--- a/SAP CAPM Overview.pptx
+++ b/SAP CAPM Overview.pptx
@@ -5,10 +5,10 @@
     <p:sldMasterId id="2147483648" r:id="rId4"/>
   </p:sldMasterIdLst>
   <p:notesMasterIdLst>
-    <p:notesMasterId r:id="rId14"/>
+    <p:notesMasterId r:id="rId20"/>
   </p:notesMasterIdLst>
   <p:handoutMasterIdLst>
-    <p:handoutMasterId r:id="rId15"/>
+    <p:handoutMasterId r:id="rId21"/>
   </p:handoutMasterIdLst>
   <p:sldIdLst>
     <p:sldId id="256" r:id="rId5"/>
@@ -20,6 +20,12 @@
     <p:sldId id="293" r:id="rId11"/>
     <p:sldId id="294" r:id="rId12"/>
     <p:sldId id="295" r:id="rId13"/>
+    <p:sldId id="297" r:id="rId14"/>
+    <p:sldId id="299" r:id="rId15"/>
+    <p:sldId id="298" r:id="rId16"/>
+    <p:sldId id="300" r:id="rId17"/>
+    <p:sldId id="301" r:id="rId18"/>
+    <p:sldId id="296" r:id="rId19"/>
   </p:sldIdLst>
   <p:sldSz cx="12192000" cy="6858000"/>
   <p:notesSz cx="6858000" cy="9144000"/>
@@ -887,6 +893,753 @@
 </dgm:colorsDef>
 </file>
 
+<file path=ppt/diagrams/colors2.xml><?xml version="1.0" encoding="utf-8"?>
+<dgm:colorsDef xmlns:dgm="http://schemas.openxmlformats.org/drawingml/2006/diagram" xmlns:a="http://schemas.openxmlformats.org/drawingml/2006/main" uniqueId="urn:microsoft.com/office/officeart/2005/8/colors/accent3_2">
+  <dgm:title val=""/>
+  <dgm:desc val=""/>
+  <dgm:catLst>
+    <dgm:cat type="accent3" pri="11200"/>
+  </dgm:catLst>
+  <dgm:styleLbl name="node0">
+    <dgm:fillClrLst meth="repeat">
+      <a:schemeClr val="accent3"/>
+    </dgm:fillClrLst>
+    <dgm:linClrLst meth="repeat">
+      <a:schemeClr val="lt1"/>
+    </dgm:linClrLst>
+    <dgm:effectClrLst/>
+    <dgm:txLinClrLst/>
+    <dgm:txFillClrLst/>
+    <dgm:txEffectClrLst/>
+  </dgm:styleLbl>
+  <dgm:styleLbl name="node1">
+    <dgm:fillClrLst meth="repeat">
+      <a:schemeClr val="accent3"/>
+    </dgm:fillClrLst>
+    <dgm:linClrLst meth="repeat">
+      <a:schemeClr val="lt1"/>
+    </dgm:linClrLst>
+    <dgm:effectClrLst/>
+    <dgm:txLinClrLst/>
+    <dgm:txFillClrLst/>
+    <dgm:txEffectClrLst/>
+  </dgm:styleLbl>
+  <dgm:styleLbl name="alignNode1">
+    <dgm:fillClrLst meth="repeat">
+      <a:schemeClr val="accent3"/>
+    </dgm:fillClrLst>
+    <dgm:linClrLst meth="repeat">
+      <a:schemeClr val="accent3"/>
+    </dgm:linClrLst>
+    <dgm:effectClrLst/>
+    <dgm:txLinClrLst/>
+    <dgm:txFillClrLst/>
+    <dgm:txEffectClrLst/>
+  </dgm:styleLbl>
+  <dgm:styleLbl name="lnNode1">
+    <dgm:fillClrLst meth="repeat">
+      <a:schemeClr val="accent3"/>
+    </dgm:fillClrLst>
+    <dgm:linClrLst meth="repeat">
+      <a:schemeClr val="lt1"/>
+    </dgm:linClrLst>
+    <dgm:effectClrLst/>
+    <dgm:txLinClrLst/>
+    <dgm:txFillClrLst/>
+    <dgm:txEffectClrLst/>
+  </dgm:styleLbl>
+  <dgm:styleLbl name="vennNode1">
+    <dgm:fillClrLst meth="repeat">
+      <a:schemeClr val="accent3">
+        <a:alpha val="50000"/>
+      </a:schemeClr>
+    </dgm:fillClrLst>
+    <dgm:linClrLst meth="repeat">
+      <a:schemeClr val="lt1"/>
+    </dgm:linClrLst>
+    <dgm:effectClrLst/>
+    <dgm:txLinClrLst/>
+    <dgm:txFillClrLst/>
+    <dgm:txEffectClrLst/>
+  </dgm:styleLbl>
+  <dgm:styleLbl name="node2">
+    <dgm:fillClrLst meth="repeat">
+      <a:schemeClr val="accent3"/>
+    </dgm:fillClrLst>
+    <dgm:linClrLst meth="repeat">
+      <a:schemeClr val="lt1"/>
+    </dgm:linClrLst>
+    <dgm:effectClrLst/>
+    <dgm:txLinClrLst/>
+    <dgm:txFillClrLst/>
+    <dgm:txEffectClrLst/>
+  </dgm:styleLbl>
+  <dgm:styleLbl name="node3">
+    <dgm:fillClrLst meth="repeat">
+      <a:schemeClr val="accent3"/>
+    </dgm:fillClrLst>
+    <dgm:linClrLst meth="repeat">
+      <a:schemeClr val="lt1"/>
+    </dgm:linClrLst>
+    <dgm:effectClrLst/>
+    <dgm:txLinClrLst/>
+    <dgm:txFillClrLst/>
+    <dgm:txEffectClrLst/>
+  </dgm:styleLbl>
+  <dgm:styleLbl name="node4">
+    <dgm:fillClrLst meth="repeat">
+      <a:schemeClr val="accent3"/>
+    </dgm:fillClrLst>
+    <dgm:linClrLst meth="repeat">
+      <a:schemeClr val="lt1"/>
+    </dgm:linClrLst>
+    <dgm:effectClrLst/>
+    <dgm:txLinClrLst/>
+    <dgm:txFillClrLst/>
+    <dgm:txEffectClrLst/>
+  </dgm:styleLbl>
+  <dgm:styleLbl name="fgImgPlace1">
+    <dgm:fillClrLst meth="repeat">
+      <a:schemeClr val="accent3">
+        <a:tint val="50000"/>
+      </a:schemeClr>
+    </dgm:fillClrLst>
+    <dgm:linClrLst meth="repeat">
+      <a:schemeClr val="lt1"/>
+    </dgm:linClrLst>
+    <dgm:effectClrLst/>
+    <dgm:txLinClrLst/>
+    <dgm:txFillClrLst meth="repeat">
+      <a:schemeClr val="lt1"/>
+    </dgm:txFillClrLst>
+    <dgm:txEffectClrLst/>
+  </dgm:styleLbl>
+  <dgm:styleLbl name="alignImgPlace1">
+    <dgm:fillClrLst meth="repeat">
+      <a:schemeClr val="accent3">
+        <a:tint val="50000"/>
+      </a:schemeClr>
+    </dgm:fillClrLst>
+    <dgm:linClrLst meth="repeat">
+      <a:schemeClr val="lt1"/>
+    </dgm:linClrLst>
+    <dgm:effectClrLst/>
+    <dgm:txLinClrLst/>
+    <dgm:txFillClrLst meth="repeat">
+      <a:schemeClr val="lt1"/>
+    </dgm:txFillClrLst>
+    <dgm:txEffectClrLst/>
+  </dgm:styleLbl>
+  <dgm:styleLbl name="bgImgPlace1">
+    <dgm:fillClrLst meth="repeat">
+      <a:schemeClr val="accent3">
+        <a:tint val="50000"/>
+      </a:schemeClr>
+    </dgm:fillClrLst>
+    <dgm:linClrLst meth="repeat">
+      <a:schemeClr val="lt1"/>
+    </dgm:linClrLst>
+    <dgm:effectClrLst/>
+    <dgm:txLinClrLst/>
+    <dgm:txFillClrLst meth="repeat">
+      <a:schemeClr val="lt1"/>
+    </dgm:txFillClrLst>
+    <dgm:txEffectClrLst/>
+  </dgm:styleLbl>
+  <dgm:styleLbl name="sibTrans2D1">
+    <dgm:fillClrLst meth="repeat">
+      <a:schemeClr val="accent3">
+        <a:tint val="60000"/>
+      </a:schemeClr>
+    </dgm:fillClrLst>
+    <dgm:linClrLst meth="repeat">
+      <a:schemeClr val="accent3">
+        <a:tint val="60000"/>
+      </a:schemeClr>
+    </dgm:linClrLst>
+    <dgm:effectClrLst/>
+    <dgm:txLinClrLst/>
+    <dgm:txFillClrLst/>
+    <dgm:txEffectClrLst/>
+  </dgm:styleLbl>
+  <dgm:styleLbl name="fgSibTrans2D1">
+    <dgm:fillClrLst meth="repeat">
+      <a:schemeClr val="accent3">
+        <a:tint val="60000"/>
+      </a:schemeClr>
+    </dgm:fillClrLst>
+    <dgm:linClrLst meth="repeat">
+      <a:schemeClr val="accent3">
+        <a:tint val="60000"/>
+      </a:schemeClr>
+    </dgm:linClrLst>
+    <dgm:effectClrLst/>
+    <dgm:txLinClrLst/>
+    <dgm:txFillClrLst/>
+    <dgm:txEffectClrLst/>
+  </dgm:styleLbl>
+  <dgm:styleLbl name="bgSibTrans2D1">
+    <dgm:fillClrLst meth="repeat">
+      <a:schemeClr val="accent3">
+        <a:tint val="60000"/>
+      </a:schemeClr>
+    </dgm:fillClrLst>
+    <dgm:linClrLst meth="repeat">
+      <a:schemeClr val="accent3">
+        <a:tint val="60000"/>
+      </a:schemeClr>
+    </dgm:linClrLst>
+    <dgm:effectClrLst/>
+    <dgm:txLinClrLst/>
+    <dgm:txFillClrLst/>
+    <dgm:txEffectClrLst/>
+  </dgm:styleLbl>
+  <dgm:styleLbl name="sibTrans1D1">
+    <dgm:fillClrLst meth="repeat">
+      <a:schemeClr val="accent3"/>
+    </dgm:fillClrLst>
+    <dgm:linClrLst meth="repeat">
+      <a:schemeClr val="accent3"/>
+    </dgm:linClrLst>
+    <dgm:effectClrLst/>
+    <dgm:txLinClrLst/>
+    <dgm:txFillClrLst meth="repeat">
+      <a:schemeClr val="tx1"/>
+    </dgm:txFillClrLst>
+    <dgm:txEffectClrLst/>
+  </dgm:styleLbl>
+  <dgm:styleLbl name="callout">
+    <dgm:fillClrLst meth="repeat">
+      <a:schemeClr val="accent3"/>
+    </dgm:fillClrLst>
+    <dgm:linClrLst meth="repeat">
+      <a:schemeClr val="accent3">
+        <a:tint val="50000"/>
+      </a:schemeClr>
+    </dgm:linClrLst>
+    <dgm:effectClrLst/>
+    <dgm:txLinClrLst/>
+    <dgm:txFillClrLst meth="repeat">
+      <a:schemeClr val="tx1"/>
+    </dgm:txFillClrLst>
+    <dgm:txEffectClrLst/>
+  </dgm:styleLbl>
+  <dgm:styleLbl name="asst0">
+    <dgm:fillClrLst meth="repeat">
+      <a:schemeClr val="accent3"/>
+    </dgm:fillClrLst>
+    <dgm:linClrLst meth="repeat">
+      <a:schemeClr val="lt1"/>
+    </dgm:linClrLst>
+    <dgm:effectClrLst/>
+    <dgm:txLinClrLst/>
+    <dgm:txFillClrLst/>
+    <dgm:txEffectClrLst/>
+  </dgm:styleLbl>
+  <dgm:styleLbl name="asst1">
+    <dgm:fillClrLst meth="repeat">
+      <a:schemeClr val="accent3"/>
+    </dgm:fillClrLst>
+    <dgm:linClrLst meth="repeat">
+      <a:schemeClr val="lt1"/>
+    </dgm:linClrLst>
+    <dgm:effectClrLst/>
+    <dgm:txLinClrLst/>
+    <dgm:txFillClrLst/>
+    <dgm:txEffectClrLst/>
+  </dgm:styleLbl>
+  <dgm:styleLbl name="asst2">
+    <dgm:fillClrLst meth="repeat">
+      <a:schemeClr val="accent3"/>
+    </dgm:fillClrLst>
+    <dgm:linClrLst meth="repeat">
+      <a:schemeClr val="lt1"/>
+    </dgm:linClrLst>
+    <dgm:effectClrLst/>
+    <dgm:txLinClrLst/>
+    <dgm:txFillClrLst/>
+    <dgm:txEffectClrLst/>
+  </dgm:styleLbl>
+  <dgm:styleLbl name="asst3">
+    <dgm:fillClrLst meth="repeat">
+      <a:schemeClr val="accent3"/>
+    </dgm:fillClrLst>
+    <dgm:linClrLst meth="repeat">
+      <a:schemeClr val="lt1"/>
+    </dgm:linClrLst>
+    <dgm:effectClrLst/>
+    <dgm:txLinClrLst/>
+    <dgm:txFillClrLst/>
+    <dgm:txEffectClrLst/>
+  </dgm:styleLbl>
+  <dgm:styleLbl name="asst4">
+    <dgm:fillClrLst meth="repeat">
+      <a:schemeClr val="accent3"/>
+    </dgm:fillClrLst>
+    <dgm:linClrLst meth="repeat">
+      <a:schemeClr val="lt1"/>
+    </dgm:linClrLst>
+    <dgm:effectClrLst/>
+    <dgm:txLinClrLst/>
+    <dgm:txFillClrLst/>
+    <dgm:txEffectClrLst/>
+  </dgm:styleLbl>
+  <dgm:styleLbl name="parChTrans2D1">
+    <dgm:fillClrLst meth="repeat">
+      <a:schemeClr val="accent3">
+        <a:tint val="60000"/>
+      </a:schemeClr>
+    </dgm:fillClrLst>
+    <dgm:linClrLst meth="repeat">
+      <a:schemeClr val="accent3">
+        <a:tint val="60000"/>
+      </a:schemeClr>
+    </dgm:linClrLst>
+    <dgm:effectClrLst/>
+    <dgm:txLinClrLst/>
+    <dgm:txFillClrLst meth="repeat">
+      <a:schemeClr val="lt1"/>
+    </dgm:txFillClrLst>
+    <dgm:txEffectClrLst/>
+  </dgm:styleLbl>
+  <dgm:styleLbl name="parChTrans2D2">
+    <dgm:fillClrLst meth="repeat">
+      <a:schemeClr val="accent3"/>
+    </dgm:fillClrLst>
+    <dgm:linClrLst meth="repeat">
+      <a:schemeClr val="accent3"/>
+    </dgm:linClrLst>
+    <dgm:effectClrLst/>
+    <dgm:txLinClrLst/>
+    <dgm:txFillClrLst meth="repeat">
+      <a:schemeClr val="lt1"/>
+    </dgm:txFillClrLst>
+    <dgm:txEffectClrLst/>
+  </dgm:styleLbl>
+  <dgm:styleLbl name="parChTrans2D3">
+    <dgm:fillClrLst meth="repeat">
+      <a:schemeClr val="accent3"/>
+    </dgm:fillClrLst>
+    <dgm:linClrLst meth="repeat">
+      <a:schemeClr val="accent3"/>
+    </dgm:linClrLst>
+    <dgm:effectClrLst/>
+    <dgm:txLinClrLst/>
+    <dgm:txFillClrLst meth="repeat">
+      <a:schemeClr val="lt1"/>
+    </dgm:txFillClrLst>
+    <dgm:txEffectClrLst/>
+  </dgm:styleLbl>
+  <dgm:styleLbl name="parChTrans2D4">
+    <dgm:fillClrLst meth="repeat">
+      <a:schemeClr val="accent3"/>
+    </dgm:fillClrLst>
+    <dgm:linClrLst meth="repeat">
+      <a:schemeClr val="accent3"/>
+    </dgm:linClrLst>
+    <dgm:effectClrLst/>
+    <dgm:txLinClrLst/>
+    <dgm:txFillClrLst meth="repeat">
+      <a:schemeClr val="lt1"/>
+    </dgm:txFillClrLst>
+    <dgm:txEffectClrLst/>
+  </dgm:styleLbl>
+  <dgm:styleLbl name="parChTrans1D1">
+    <dgm:fillClrLst meth="repeat">
+      <a:schemeClr val="accent3"/>
+    </dgm:fillClrLst>
+    <dgm:linClrLst meth="repeat">
+      <a:schemeClr val="accent3">
+        <a:shade val="60000"/>
+      </a:schemeClr>
+    </dgm:linClrLst>
+    <dgm:effectClrLst/>
+    <dgm:txLinClrLst/>
+    <dgm:txFillClrLst meth="repeat">
+      <a:schemeClr val="tx1"/>
+    </dgm:txFillClrLst>
+    <dgm:txEffectClrLst/>
+  </dgm:styleLbl>
+  <dgm:styleLbl name="parChTrans1D2">
+    <dgm:fillClrLst meth="repeat">
+      <a:schemeClr val="accent3"/>
+    </dgm:fillClrLst>
+    <dgm:linClrLst meth="repeat">
+      <a:schemeClr val="accent3">
+        <a:shade val="60000"/>
+      </a:schemeClr>
+    </dgm:linClrLst>
+    <dgm:effectClrLst/>
+    <dgm:txLinClrLst/>
+    <dgm:txFillClrLst meth="repeat">
+      <a:schemeClr val="tx1"/>
+    </dgm:txFillClrLst>
+    <dgm:txEffectClrLst/>
+  </dgm:styleLbl>
+  <dgm:styleLbl name="parChTrans1D3">
+    <dgm:fillClrLst meth="repeat">
+      <a:schemeClr val="accent3"/>
+    </dgm:fillClrLst>
+    <dgm:linClrLst meth="repeat">
+      <a:schemeClr val="accent3">
+        <a:shade val="80000"/>
+      </a:schemeClr>
+    </dgm:linClrLst>
+    <dgm:effectClrLst/>
+    <dgm:txLinClrLst/>
+    <dgm:txFillClrLst meth="repeat">
+      <a:schemeClr val="tx1"/>
+    </dgm:txFillClrLst>
+    <dgm:txEffectClrLst/>
+  </dgm:styleLbl>
+  <dgm:styleLbl name="parChTrans1D4">
+    <dgm:fillClrLst meth="repeat">
+      <a:schemeClr val="accent3"/>
+    </dgm:fillClrLst>
+    <dgm:linClrLst meth="repeat">
+      <a:schemeClr val="accent3">
+        <a:shade val="80000"/>
+      </a:schemeClr>
+    </dgm:linClrLst>
+    <dgm:effectClrLst/>
+    <dgm:txLinClrLst/>
+    <dgm:txFillClrLst meth="repeat">
+      <a:schemeClr val="tx1"/>
+    </dgm:txFillClrLst>
+    <dgm:txEffectClrLst/>
+  </dgm:styleLbl>
+  <dgm:styleLbl name="fgAcc1">
+    <dgm:fillClrLst meth="repeat">
+      <a:schemeClr val="lt1">
+        <a:alpha val="90000"/>
+      </a:schemeClr>
+    </dgm:fillClrLst>
+    <dgm:linClrLst meth="repeat">
+      <a:schemeClr val="accent3"/>
+    </dgm:linClrLst>
+    <dgm:effectClrLst/>
+    <dgm:txLinClrLst/>
+    <dgm:txFillClrLst meth="repeat">
+      <a:schemeClr val="dk1"/>
+    </dgm:txFillClrLst>
+    <dgm:txEffectClrLst/>
+  </dgm:styleLbl>
+  <dgm:styleLbl name="conFgAcc1">
+    <dgm:fillClrLst meth="repeat">
+      <a:schemeClr val="lt1">
+        <a:alpha val="90000"/>
+      </a:schemeClr>
+    </dgm:fillClrLst>
+    <dgm:linClrLst meth="repeat">
+      <a:schemeClr val="accent3"/>
+    </dgm:linClrLst>
+    <dgm:effectClrLst/>
+    <dgm:txLinClrLst/>
+    <dgm:txFillClrLst meth="repeat">
+      <a:schemeClr val="dk1"/>
+    </dgm:txFillClrLst>
+    <dgm:txEffectClrLst/>
+  </dgm:styleLbl>
+  <dgm:styleLbl name="alignAcc1">
+    <dgm:fillClrLst meth="repeat">
+      <a:schemeClr val="lt1">
+        <a:alpha val="90000"/>
+      </a:schemeClr>
+    </dgm:fillClrLst>
+    <dgm:linClrLst meth="repeat">
+      <a:schemeClr val="accent3"/>
+    </dgm:linClrLst>
+    <dgm:effectClrLst/>
+    <dgm:txLinClrLst/>
+    <dgm:txFillClrLst meth="repeat">
+      <a:schemeClr val="dk1"/>
+    </dgm:txFillClrLst>
+    <dgm:txEffectClrLst/>
+  </dgm:styleLbl>
+  <dgm:styleLbl name="trAlignAcc1">
+    <dgm:fillClrLst meth="repeat">
+      <a:schemeClr val="lt1">
+        <a:alpha val="40000"/>
+      </a:schemeClr>
+    </dgm:fillClrLst>
+    <dgm:linClrLst meth="repeat">
+      <a:schemeClr val="accent3"/>
+    </dgm:linClrLst>
+    <dgm:effectClrLst/>
+    <dgm:txLinClrLst/>
+    <dgm:txFillClrLst meth="repeat">
+      <a:schemeClr val="dk1"/>
+    </dgm:txFillClrLst>
+    <dgm:txEffectClrLst/>
+  </dgm:styleLbl>
+  <dgm:styleLbl name="bgAcc1">
+    <dgm:fillClrLst meth="repeat">
+      <a:schemeClr val="lt1">
+        <a:alpha val="90000"/>
+      </a:schemeClr>
+    </dgm:fillClrLst>
+    <dgm:linClrLst meth="repeat">
+      <a:schemeClr val="accent3"/>
+    </dgm:linClrLst>
+    <dgm:effectClrLst/>
+    <dgm:txLinClrLst/>
+    <dgm:txFillClrLst meth="repeat">
+      <a:schemeClr val="dk1"/>
+    </dgm:txFillClrLst>
+    <dgm:txEffectClrLst/>
+  </dgm:styleLbl>
+  <dgm:styleLbl name="solidFgAcc1">
+    <dgm:fillClrLst meth="repeat">
+      <a:schemeClr val="lt1"/>
+    </dgm:fillClrLst>
+    <dgm:linClrLst meth="repeat">
+      <a:schemeClr val="accent3"/>
+    </dgm:linClrLst>
+    <dgm:effectClrLst/>
+    <dgm:txLinClrLst/>
+    <dgm:txFillClrLst meth="repeat">
+      <a:schemeClr val="dk1"/>
+    </dgm:txFillClrLst>
+    <dgm:txEffectClrLst/>
+  </dgm:styleLbl>
+  <dgm:styleLbl name="solidAlignAcc1">
+    <dgm:fillClrLst meth="repeat">
+      <a:schemeClr val="lt1"/>
+    </dgm:fillClrLst>
+    <dgm:linClrLst meth="repeat">
+      <a:schemeClr val="accent3"/>
+    </dgm:linClrLst>
+    <dgm:effectClrLst/>
+    <dgm:txLinClrLst/>
+    <dgm:txFillClrLst meth="repeat">
+      <a:schemeClr val="dk1"/>
+    </dgm:txFillClrLst>
+    <dgm:txEffectClrLst/>
+  </dgm:styleLbl>
+  <dgm:styleLbl name="solidBgAcc1">
+    <dgm:fillClrLst meth="repeat">
+      <a:schemeClr val="lt1"/>
+    </dgm:fillClrLst>
+    <dgm:linClrLst meth="repeat">
+      <a:schemeClr val="accent3"/>
+    </dgm:linClrLst>
+    <dgm:effectClrLst/>
+    <dgm:txLinClrLst/>
+    <dgm:txFillClrLst meth="repeat">
+      <a:schemeClr val="dk1"/>
+    </dgm:txFillClrLst>
+    <dgm:txEffectClrLst/>
+  </dgm:styleLbl>
+  <dgm:styleLbl name="fgAccFollowNode1">
+    <dgm:fillClrLst meth="repeat">
+      <a:schemeClr val="accent3">
+        <a:alpha val="90000"/>
+        <a:tint val="40000"/>
+      </a:schemeClr>
+    </dgm:fillClrLst>
+    <dgm:linClrLst meth="repeat">
+      <a:schemeClr val="accent3">
+        <a:alpha val="90000"/>
+        <a:tint val="40000"/>
+      </a:schemeClr>
+    </dgm:linClrLst>
+    <dgm:effectClrLst/>
+    <dgm:txLinClrLst/>
+    <dgm:txFillClrLst meth="repeat">
+      <a:schemeClr val="dk1"/>
+    </dgm:txFillClrLst>
+    <dgm:txEffectClrLst/>
+  </dgm:styleLbl>
+  <dgm:styleLbl name="alignAccFollowNode1">
+    <dgm:fillClrLst meth="repeat">
+      <a:schemeClr val="accent3">
+        <a:alpha val="90000"/>
+        <a:tint val="40000"/>
+      </a:schemeClr>
+    </dgm:fillClrLst>
+    <dgm:linClrLst meth="repeat">
+      <a:schemeClr val="accent3">
+        <a:alpha val="90000"/>
+        <a:tint val="40000"/>
+      </a:schemeClr>
+    </dgm:linClrLst>
+    <dgm:effectClrLst/>
+    <dgm:txLinClrLst/>
+    <dgm:txFillClrLst meth="repeat">
+      <a:schemeClr val="dk1"/>
+    </dgm:txFillClrLst>
+    <dgm:txEffectClrLst/>
+  </dgm:styleLbl>
+  <dgm:styleLbl name="bgAccFollowNode1">
+    <dgm:fillClrLst meth="repeat">
+      <a:schemeClr val="accent3">
+        <a:alpha val="90000"/>
+        <a:tint val="40000"/>
+      </a:schemeClr>
+    </dgm:fillClrLst>
+    <dgm:linClrLst meth="repeat">
+      <a:schemeClr val="accent3">
+        <a:alpha val="90000"/>
+        <a:tint val="40000"/>
+      </a:schemeClr>
+    </dgm:linClrLst>
+    <dgm:effectClrLst/>
+    <dgm:txLinClrLst/>
+    <dgm:txFillClrLst meth="repeat">
+      <a:schemeClr val="dk1"/>
+    </dgm:txFillClrLst>
+    <dgm:txEffectClrLst/>
+  </dgm:styleLbl>
+  <dgm:styleLbl name="fgAcc0">
+    <dgm:fillClrLst meth="repeat">
+      <a:schemeClr val="lt1">
+        <a:alpha val="90000"/>
+      </a:schemeClr>
+    </dgm:fillClrLst>
+    <dgm:linClrLst meth="repeat">
+      <a:schemeClr val="accent3"/>
+    </dgm:linClrLst>
+    <dgm:effectClrLst/>
+    <dgm:txLinClrLst/>
+    <dgm:txFillClrLst meth="repeat">
+      <a:schemeClr val="dk1"/>
+    </dgm:txFillClrLst>
+    <dgm:txEffectClrLst/>
+  </dgm:styleLbl>
+  <dgm:styleLbl name="fgAcc2">
+    <dgm:fillClrLst meth="repeat">
+      <a:schemeClr val="lt1">
+        <a:alpha val="90000"/>
+      </a:schemeClr>
+    </dgm:fillClrLst>
+    <dgm:linClrLst meth="repeat">
+      <a:schemeClr val="accent3"/>
+    </dgm:linClrLst>
+    <dgm:effectClrLst/>
+    <dgm:txLinClrLst/>
+    <dgm:txFillClrLst meth="repeat">
+      <a:schemeClr val="dk1"/>
+    </dgm:txFillClrLst>
+    <dgm:txEffectClrLst/>
+  </dgm:styleLbl>
+  <dgm:styleLbl name="fgAcc3">
+    <dgm:fillClrLst meth="repeat">
+      <a:schemeClr val="lt1">
+        <a:alpha val="90000"/>
+      </a:schemeClr>
+    </dgm:fillClrLst>
+    <dgm:linClrLst meth="repeat">
+      <a:schemeClr val="accent3"/>
+    </dgm:linClrLst>
+    <dgm:effectClrLst/>
+    <dgm:txLinClrLst/>
+    <dgm:txFillClrLst meth="repeat">
+      <a:schemeClr val="dk1"/>
+    </dgm:txFillClrLst>
+    <dgm:txEffectClrLst/>
+  </dgm:styleLbl>
+  <dgm:styleLbl name="fgAcc4">
+    <dgm:fillClrLst meth="repeat">
+      <a:schemeClr val="lt1">
+        <a:alpha val="90000"/>
+      </a:schemeClr>
+    </dgm:fillClrLst>
+    <dgm:linClrLst meth="repeat">
+      <a:schemeClr val="accent3"/>
+    </dgm:linClrLst>
+    <dgm:effectClrLst/>
+    <dgm:txLinClrLst/>
+    <dgm:txFillClrLst meth="repeat">
+      <a:schemeClr val="dk1"/>
+    </dgm:txFillClrLst>
+    <dgm:txEffectClrLst/>
+  </dgm:styleLbl>
+  <dgm:styleLbl name="bgShp">
+    <dgm:fillClrLst meth="repeat">
+      <a:schemeClr val="accent3">
+        <a:tint val="40000"/>
+      </a:schemeClr>
+    </dgm:fillClrLst>
+    <dgm:linClrLst meth="repeat">
+      <a:schemeClr val="accent3"/>
+    </dgm:linClrLst>
+    <dgm:effectClrLst/>
+    <dgm:txLinClrLst/>
+    <dgm:txFillClrLst meth="repeat">
+      <a:schemeClr val="dk1"/>
+    </dgm:txFillClrLst>
+    <dgm:txEffectClrLst/>
+  </dgm:styleLbl>
+  <dgm:styleLbl name="dkBgShp">
+    <dgm:fillClrLst meth="repeat">
+      <a:schemeClr val="accent3">
+        <a:shade val="80000"/>
+      </a:schemeClr>
+    </dgm:fillClrLst>
+    <dgm:linClrLst meth="repeat">
+      <a:schemeClr val="accent3"/>
+    </dgm:linClrLst>
+    <dgm:effectClrLst/>
+    <dgm:txLinClrLst/>
+    <dgm:txFillClrLst meth="repeat">
+      <a:schemeClr val="lt1"/>
+    </dgm:txFillClrLst>
+    <dgm:txEffectClrLst/>
+  </dgm:styleLbl>
+  <dgm:styleLbl name="trBgShp">
+    <dgm:fillClrLst meth="repeat">
+      <a:schemeClr val="accent3">
+        <a:tint val="50000"/>
+        <a:alpha val="40000"/>
+      </a:schemeClr>
+    </dgm:fillClrLst>
+    <dgm:linClrLst meth="repeat">
+      <a:schemeClr val="accent3"/>
+    </dgm:linClrLst>
+    <dgm:effectClrLst/>
+    <dgm:txLinClrLst/>
+    <dgm:txFillClrLst meth="repeat">
+      <a:schemeClr val="lt1"/>
+    </dgm:txFillClrLst>
+    <dgm:txEffectClrLst/>
+  </dgm:styleLbl>
+  <dgm:styleLbl name="fgShp">
+    <dgm:fillClrLst meth="repeat">
+      <a:schemeClr val="accent3">
+        <a:tint val="60000"/>
+      </a:schemeClr>
+    </dgm:fillClrLst>
+    <dgm:linClrLst meth="repeat">
+      <a:schemeClr val="lt1"/>
+    </dgm:linClrLst>
+    <dgm:effectClrLst/>
+    <dgm:txLinClrLst/>
+    <dgm:txFillClrLst meth="repeat">
+      <a:schemeClr val="dk1"/>
+    </dgm:txFillClrLst>
+    <dgm:txEffectClrLst/>
+  </dgm:styleLbl>
+  <dgm:styleLbl name="revTx">
+    <dgm:fillClrLst meth="repeat">
+      <a:schemeClr val="lt1">
+        <a:alpha val="0"/>
+      </a:schemeClr>
+    </dgm:fillClrLst>
+    <dgm:linClrLst meth="repeat">
+      <a:schemeClr val="dk1">
+        <a:alpha val="0"/>
+      </a:schemeClr>
+    </dgm:linClrLst>
+    <dgm:effectClrLst/>
+    <dgm:txLinClrLst/>
+    <dgm:txFillClrLst meth="repeat">
+      <a:schemeClr val="tx1"/>
+    </dgm:txFillClrLst>
+    <dgm:txEffectClrLst/>
+  </dgm:styleLbl>
+</dgm:colorsDef>
+</file>
+
 <file path=ppt/diagrams/data1.xml><?xml version="1.0" encoding="utf-8"?>
 <dgm:dataModel xmlns:dgm="http://schemas.openxmlformats.org/drawingml/2006/diagram" xmlns:a="http://schemas.openxmlformats.org/drawingml/2006/main">
   <dgm:ptLst>
@@ -1102,6 +1855,246 @@
     <dgm:cxn modelId="{A50F1A81-3169-4AF5-A74B-CCF885290C84}" type="presParOf" srcId="{84AF125F-28B5-45AF-A3BE-EBD61CF8B938}" destId="{A0C26E00-407E-4F8F-9AD0-DC2A69410F05}" srcOrd="1" destOrd="0" presId="urn:microsoft.com/office/officeart/2018/2/layout/IconVerticalSolidList"/>
     <dgm:cxn modelId="{80E4ABC6-596A-40CE-9E78-6DA064B3D944}" type="presParOf" srcId="{84AF125F-28B5-45AF-A3BE-EBD61CF8B938}" destId="{9CDC1CF2-5CA8-4F61-92DB-9AA47296CE80}" srcOrd="2" destOrd="0" presId="urn:microsoft.com/office/officeart/2018/2/layout/IconVerticalSolidList"/>
     <dgm:cxn modelId="{86CA4DAF-069D-4AF8-8EC5-152EB20928B5}" type="presParOf" srcId="{84AF125F-28B5-45AF-A3BE-EBD61CF8B938}" destId="{F3E004C0-AD54-4D15-A884-B7C4B10B4646}" srcOrd="3" destOrd="0" presId="urn:microsoft.com/office/officeart/2018/2/layout/IconVerticalSolidList"/>
+  </dgm:cxnLst>
+  <dgm:bg/>
+  <dgm:whole/>
+  <dgm:extLst>
+    <a:ext uri="http://schemas.microsoft.com/office/drawing/2008/diagram">
+      <dsp:dataModelExt xmlns:dsp="http://schemas.microsoft.com/office/drawing/2008/diagram" relId="rId6" minVer="http://schemas.openxmlformats.org/drawingml/2006/diagram"/>
+    </a:ext>
+  </dgm:extLst>
+</dgm:dataModel>
+</file>
+
+<file path=ppt/diagrams/data2.xml><?xml version="1.0" encoding="utf-8"?>
+<dgm:dataModel xmlns:dgm="http://schemas.openxmlformats.org/drawingml/2006/diagram" xmlns:a="http://schemas.openxmlformats.org/drawingml/2006/main">
+  <dgm:ptLst>
+    <dgm:pt modelId="{DA327801-B2F0-4B69-B37B-9B44673F57A7}" type="doc">
+      <dgm:prSet loTypeId="urn:microsoft.com/office/officeart/2005/8/layout/hChevron3" loCatId="process" qsTypeId="urn:microsoft.com/office/officeart/2005/8/quickstyle/simple2" qsCatId="simple" csTypeId="urn:microsoft.com/office/officeart/2005/8/colors/accent3_2" csCatId="accent3"/>
+      <dgm:spPr/>
+      <dgm:t>
+        <a:bodyPr/>
+        <a:lstStyle/>
+        <a:p>
+          <a:endParaRPr lang="en-US"/>
+        </a:p>
+      </dgm:t>
+    </dgm:pt>
+    <dgm:pt modelId="{22851F44-ABAD-451C-A2BE-6DAD424F72AD}">
+      <dgm:prSet/>
+      <dgm:spPr/>
+      <dgm:t>
+        <a:bodyPr/>
+        <a:lstStyle/>
+        <a:p>
+          <a:r>
+            <a:rPr lang="en-US"/>
+            <a:t>app</a:t>
+          </a:r>
+        </a:p>
+      </dgm:t>
+    </dgm:pt>
+    <dgm:pt modelId="{B608A9DE-A408-4D34-9BB3-5337E0CE1979}" type="parTrans" cxnId="{34FF6506-C3B2-419F-8B1C-C9D3D7ADFF27}">
+      <dgm:prSet/>
+      <dgm:spPr/>
+      <dgm:t>
+        <a:bodyPr/>
+        <a:lstStyle/>
+        <a:p>
+          <a:endParaRPr lang="en-US"/>
+        </a:p>
+      </dgm:t>
+    </dgm:pt>
+    <dgm:pt modelId="{0620B5A1-8AA6-4C17-8880-D2FF98CEA93A}" type="sibTrans" cxnId="{34FF6506-C3B2-419F-8B1C-C9D3D7ADFF27}">
+      <dgm:prSet/>
+      <dgm:spPr/>
+      <dgm:t>
+        <a:bodyPr/>
+        <a:lstStyle/>
+        <a:p>
+          <a:endParaRPr lang="en-US"/>
+        </a:p>
+      </dgm:t>
+    </dgm:pt>
+    <dgm:pt modelId="{539EC032-8BE0-44FA-BCC1-1FEF57E80494}">
+      <dgm:prSet/>
+      <dgm:spPr/>
+      <dgm:t>
+        <a:bodyPr/>
+        <a:lstStyle/>
+        <a:p>
+          <a:r>
+            <a:rPr lang="en-US"/>
+            <a:t>db</a:t>
+          </a:r>
+        </a:p>
+      </dgm:t>
+    </dgm:pt>
+    <dgm:pt modelId="{A650FC90-2495-4A5F-B2A0-0B3564CA1DB6}" type="parTrans" cxnId="{D8269F91-C3D1-4FED-B0B1-CA2B8E9554E7}">
+      <dgm:prSet/>
+      <dgm:spPr/>
+      <dgm:t>
+        <a:bodyPr/>
+        <a:lstStyle/>
+        <a:p>
+          <a:endParaRPr lang="en-US"/>
+        </a:p>
+      </dgm:t>
+    </dgm:pt>
+    <dgm:pt modelId="{45276A47-24F2-430E-9076-C9D9BFD23A37}" type="sibTrans" cxnId="{D8269F91-C3D1-4FED-B0B1-CA2B8E9554E7}">
+      <dgm:prSet/>
+      <dgm:spPr/>
+      <dgm:t>
+        <a:bodyPr/>
+        <a:lstStyle/>
+        <a:p>
+          <a:endParaRPr lang="en-US"/>
+        </a:p>
+      </dgm:t>
+    </dgm:pt>
+    <dgm:pt modelId="{55122C4F-920A-408E-BDCF-88FB67670794}">
+      <dgm:prSet/>
+      <dgm:spPr/>
+      <dgm:t>
+        <a:bodyPr/>
+        <a:lstStyle/>
+        <a:p>
+          <a:r>
+            <a:rPr lang="en-US"/>
+            <a:t>srv</a:t>
+          </a:r>
+        </a:p>
+      </dgm:t>
+    </dgm:pt>
+    <dgm:pt modelId="{C3552436-2256-49F1-A3A4-F97D2A7D7CF5}" type="parTrans" cxnId="{A7FFFD7F-11A8-4BAB-A353-73D3042B892B}">
+      <dgm:prSet/>
+      <dgm:spPr/>
+      <dgm:t>
+        <a:bodyPr/>
+        <a:lstStyle/>
+        <a:p>
+          <a:endParaRPr lang="en-US"/>
+        </a:p>
+      </dgm:t>
+    </dgm:pt>
+    <dgm:pt modelId="{374FBC2F-A7E5-437D-B3AD-E4307C3249DB}" type="sibTrans" cxnId="{A7FFFD7F-11A8-4BAB-A353-73D3042B892B}">
+      <dgm:prSet/>
+      <dgm:spPr/>
+      <dgm:t>
+        <a:bodyPr/>
+        <a:lstStyle/>
+        <a:p>
+          <a:endParaRPr lang="en-US"/>
+        </a:p>
+      </dgm:t>
+    </dgm:pt>
+    <dgm:pt modelId="{3DDD8473-4BCC-481A-A021-594F266B1461}">
+      <dgm:prSet/>
+      <dgm:spPr/>
+      <dgm:t>
+        <a:bodyPr/>
+        <a:lstStyle/>
+        <a:p>
+          <a:r>
+            <a:rPr lang="en-US"/>
+            <a:t>packagse.json</a:t>
+          </a:r>
+        </a:p>
+      </dgm:t>
+    </dgm:pt>
+    <dgm:pt modelId="{9AAE34FF-886F-45D8-8C6B-3E034759446C}" type="parTrans" cxnId="{08C4C737-0D15-4444-B50C-683A65D016E3}">
+      <dgm:prSet/>
+      <dgm:spPr/>
+      <dgm:t>
+        <a:bodyPr/>
+        <a:lstStyle/>
+        <a:p>
+          <a:endParaRPr lang="en-US"/>
+        </a:p>
+      </dgm:t>
+    </dgm:pt>
+    <dgm:pt modelId="{8F321D6B-98C7-4D1F-8CBF-D4369D9321E4}" type="sibTrans" cxnId="{08C4C737-0D15-4444-B50C-683A65D016E3}">
+      <dgm:prSet/>
+      <dgm:spPr/>
+      <dgm:t>
+        <a:bodyPr/>
+        <a:lstStyle/>
+        <a:p>
+          <a:endParaRPr lang="en-US"/>
+        </a:p>
+      </dgm:t>
+    </dgm:pt>
+    <dgm:pt modelId="{01014CF4-6195-486C-BADA-A0F685AA374A}" type="pres">
+      <dgm:prSet presAssocID="{DA327801-B2F0-4B69-B37B-9B44673F57A7}" presName="Name0" presStyleCnt="0">
+        <dgm:presLayoutVars>
+          <dgm:dir/>
+          <dgm:resizeHandles val="exact"/>
+        </dgm:presLayoutVars>
+      </dgm:prSet>
+      <dgm:spPr/>
+    </dgm:pt>
+    <dgm:pt modelId="{85D595FD-8DE0-4EF2-8466-0AE63EBA5D7A}" type="pres">
+      <dgm:prSet presAssocID="{22851F44-ABAD-451C-A2BE-6DAD424F72AD}" presName="parTxOnly" presStyleLbl="node1" presStyleIdx="0" presStyleCnt="4">
+        <dgm:presLayoutVars>
+          <dgm:bulletEnabled val="1"/>
+        </dgm:presLayoutVars>
+      </dgm:prSet>
+      <dgm:spPr/>
+    </dgm:pt>
+    <dgm:pt modelId="{C1DA355E-AC24-4254-ABC1-994197BA23C2}" type="pres">
+      <dgm:prSet presAssocID="{0620B5A1-8AA6-4C17-8880-D2FF98CEA93A}" presName="parSpace" presStyleCnt="0"/>
+      <dgm:spPr/>
+    </dgm:pt>
+    <dgm:pt modelId="{4B52AF6D-0B18-47CB-9169-D57FF78B69F0}" type="pres">
+      <dgm:prSet presAssocID="{539EC032-8BE0-44FA-BCC1-1FEF57E80494}" presName="parTxOnly" presStyleLbl="node1" presStyleIdx="1" presStyleCnt="4">
+        <dgm:presLayoutVars>
+          <dgm:bulletEnabled val="1"/>
+        </dgm:presLayoutVars>
+      </dgm:prSet>
+      <dgm:spPr/>
+    </dgm:pt>
+    <dgm:pt modelId="{797AF0CF-6044-4942-90B8-E27FD6B901E0}" type="pres">
+      <dgm:prSet presAssocID="{45276A47-24F2-430E-9076-C9D9BFD23A37}" presName="parSpace" presStyleCnt="0"/>
+      <dgm:spPr/>
+    </dgm:pt>
+    <dgm:pt modelId="{9FADA234-2674-40A6-BF7E-BDEF475EE797}" type="pres">
+      <dgm:prSet presAssocID="{55122C4F-920A-408E-BDCF-88FB67670794}" presName="parTxOnly" presStyleLbl="node1" presStyleIdx="2" presStyleCnt="4">
+        <dgm:presLayoutVars>
+          <dgm:bulletEnabled val="1"/>
+        </dgm:presLayoutVars>
+      </dgm:prSet>
+      <dgm:spPr/>
+    </dgm:pt>
+    <dgm:pt modelId="{03D7D7E3-58C9-4618-B892-F1A278463B20}" type="pres">
+      <dgm:prSet presAssocID="{374FBC2F-A7E5-437D-B3AD-E4307C3249DB}" presName="parSpace" presStyleCnt="0"/>
+      <dgm:spPr/>
+    </dgm:pt>
+    <dgm:pt modelId="{A5D8406F-B53B-46ED-8A4F-AB186B6071B9}" type="pres">
+      <dgm:prSet presAssocID="{3DDD8473-4BCC-481A-A021-594F266B1461}" presName="parTxOnly" presStyleLbl="node1" presStyleIdx="3" presStyleCnt="4">
+        <dgm:presLayoutVars>
+          <dgm:bulletEnabled val="1"/>
+        </dgm:presLayoutVars>
+      </dgm:prSet>
+      <dgm:spPr/>
+    </dgm:pt>
+  </dgm:ptLst>
+  <dgm:cxnLst>
+    <dgm:cxn modelId="{34FF6506-C3B2-419F-8B1C-C9D3D7ADFF27}" srcId="{DA327801-B2F0-4B69-B37B-9B44673F57A7}" destId="{22851F44-ABAD-451C-A2BE-6DAD424F72AD}" srcOrd="0" destOrd="0" parTransId="{B608A9DE-A408-4D34-9BB3-5337E0CE1979}" sibTransId="{0620B5A1-8AA6-4C17-8880-D2FF98CEA93A}"/>
+    <dgm:cxn modelId="{838A391A-4953-4617-9589-00D3809F9E94}" type="presOf" srcId="{539EC032-8BE0-44FA-BCC1-1FEF57E80494}" destId="{4B52AF6D-0B18-47CB-9169-D57FF78B69F0}" srcOrd="0" destOrd="0" presId="urn:microsoft.com/office/officeart/2005/8/layout/hChevron3"/>
+    <dgm:cxn modelId="{989B8520-1220-4BD3-9BC0-5FF08A54C05B}" type="presOf" srcId="{3DDD8473-4BCC-481A-A021-594F266B1461}" destId="{A5D8406F-B53B-46ED-8A4F-AB186B6071B9}" srcOrd="0" destOrd="0" presId="urn:microsoft.com/office/officeart/2005/8/layout/hChevron3"/>
+    <dgm:cxn modelId="{08C4C737-0D15-4444-B50C-683A65D016E3}" srcId="{DA327801-B2F0-4B69-B37B-9B44673F57A7}" destId="{3DDD8473-4BCC-481A-A021-594F266B1461}" srcOrd="3" destOrd="0" parTransId="{9AAE34FF-886F-45D8-8C6B-3E034759446C}" sibTransId="{8F321D6B-98C7-4D1F-8CBF-D4369D9321E4}"/>
+    <dgm:cxn modelId="{A67AA15F-507F-4219-B2EA-F88DB410DC82}" type="presOf" srcId="{55122C4F-920A-408E-BDCF-88FB67670794}" destId="{9FADA234-2674-40A6-BF7E-BDEF475EE797}" srcOrd="0" destOrd="0" presId="urn:microsoft.com/office/officeart/2005/8/layout/hChevron3"/>
+    <dgm:cxn modelId="{48368349-2432-4AAE-93A9-F99789D551D7}" type="presOf" srcId="{DA327801-B2F0-4B69-B37B-9B44673F57A7}" destId="{01014CF4-6195-486C-BADA-A0F685AA374A}" srcOrd="0" destOrd="0" presId="urn:microsoft.com/office/officeart/2005/8/layout/hChevron3"/>
+    <dgm:cxn modelId="{A7FFFD7F-11A8-4BAB-A353-73D3042B892B}" srcId="{DA327801-B2F0-4B69-B37B-9B44673F57A7}" destId="{55122C4F-920A-408E-BDCF-88FB67670794}" srcOrd="2" destOrd="0" parTransId="{C3552436-2256-49F1-A3A4-F97D2A7D7CF5}" sibTransId="{374FBC2F-A7E5-437D-B3AD-E4307C3249DB}"/>
+    <dgm:cxn modelId="{D8269F91-C3D1-4FED-B0B1-CA2B8E9554E7}" srcId="{DA327801-B2F0-4B69-B37B-9B44673F57A7}" destId="{539EC032-8BE0-44FA-BCC1-1FEF57E80494}" srcOrd="1" destOrd="0" parTransId="{A650FC90-2495-4A5F-B2A0-0B3564CA1DB6}" sibTransId="{45276A47-24F2-430E-9076-C9D9BFD23A37}"/>
+    <dgm:cxn modelId="{51ADEC91-1CC7-40F2-9EC0-5C7848E3BC2C}" type="presOf" srcId="{22851F44-ABAD-451C-A2BE-6DAD424F72AD}" destId="{85D595FD-8DE0-4EF2-8466-0AE63EBA5D7A}" srcOrd="0" destOrd="0" presId="urn:microsoft.com/office/officeart/2005/8/layout/hChevron3"/>
+    <dgm:cxn modelId="{0B94231E-8BD1-447E-984C-48535E57BF00}" type="presParOf" srcId="{01014CF4-6195-486C-BADA-A0F685AA374A}" destId="{85D595FD-8DE0-4EF2-8466-0AE63EBA5D7A}" srcOrd="0" destOrd="0" presId="urn:microsoft.com/office/officeart/2005/8/layout/hChevron3"/>
+    <dgm:cxn modelId="{927B8A65-0914-4D3E-A095-50E009AA4510}" type="presParOf" srcId="{01014CF4-6195-486C-BADA-A0F685AA374A}" destId="{C1DA355E-AC24-4254-ABC1-994197BA23C2}" srcOrd="1" destOrd="0" presId="urn:microsoft.com/office/officeart/2005/8/layout/hChevron3"/>
+    <dgm:cxn modelId="{C98CFF46-490B-4FBB-AFE4-05C280540E23}" type="presParOf" srcId="{01014CF4-6195-486C-BADA-A0F685AA374A}" destId="{4B52AF6D-0B18-47CB-9169-D57FF78B69F0}" srcOrd="2" destOrd="0" presId="urn:microsoft.com/office/officeart/2005/8/layout/hChevron3"/>
+    <dgm:cxn modelId="{E9ADCD85-0745-4ABB-BD10-14EA18634ED1}" type="presParOf" srcId="{01014CF4-6195-486C-BADA-A0F685AA374A}" destId="{797AF0CF-6044-4942-90B8-E27FD6B901E0}" srcOrd="3" destOrd="0" presId="urn:microsoft.com/office/officeart/2005/8/layout/hChevron3"/>
+    <dgm:cxn modelId="{AF6C26B7-EF61-4A09-B6C1-8B5234869D8C}" type="presParOf" srcId="{01014CF4-6195-486C-BADA-A0F685AA374A}" destId="{9FADA234-2674-40A6-BF7E-BDEF475EE797}" srcOrd="4" destOrd="0" presId="urn:microsoft.com/office/officeart/2005/8/layout/hChevron3"/>
+    <dgm:cxn modelId="{0317C8BD-DCFD-48C0-8D9F-22A74E61D173}" type="presParOf" srcId="{01014CF4-6195-486C-BADA-A0F685AA374A}" destId="{03D7D7E3-58C9-4618-B892-F1A278463B20}" srcOrd="5" destOrd="0" presId="urn:microsoft.com/office/officeart/2005/8/layout/hChevron3"/>
+    <dgm:cxn modelId="{C7C3C11A-1CA4-46D7-8778-8BDDBE77DA63}" type="presParOf" srcId="{01014CF4-6195-486C-BADA-A0F685AA374A}" destId="{A5D8406F-B53B-46ED-8A4F-AB186B6071B9}" srcOrd="6" destOrd="0" presId="urn:microsoft.com/office/officeart/2005/8/layout/hChevron3"/>
   </dgm:cxnLst>
   <dgm:bg/>
   <dgm:whole/>
@@ -1429,6 +2422,330 @@
 </dsp:drawing>
 </file>
 
+<file path=ppt/diagrams/drawing2.xml><?xml version="1.0" encoding="utf-8"?>
+<dsp:drawing xmlns:dgm="http://schemas.openxmlformats.org/drawingml/2006/diagram" xmlns:dsp="http://schemas.microsoft.com/office/drawing/2008/diagram" xmlns:a="http://schemas.openxmlformats.org/drawingml/2006/main">
+  <dsp:spTree>
+    <dsp:nvGrpSpPr>
+      <dsp:cNvPr id="0" name=""/>
+      <dsp:cNvGrpSpPr/>
+    </dsp:nvGrpSpPr>
+    <dsp:grpSpPr/>
+    <dsp:sp modelId="{85D595FD-8DE0-4EF2-8466-0AE63EBA5D7A}">
+      <dsp:nvSpPr>
+        <dsp:cNvPr id="0" name=""/>
+        <dsp:cNvSpPr/>
+      </dsp:nvSpPr>
+      <dsp:spPr>
+        <a:xfrm>
+          <a:off x="3285" y="1516335"/>
+          <a:ext cx="3296665" cy="1318666"/>
+        </a:xfrm>
+        <a:prstGeom prst="homePlate">
+          <a:avLst/>
+        </a:prstGeom>
+        <a:solidFill>
+          <a:schemeClr val="accent3">
+            <a:hueOff val="0"/>
+            <a:satOff val="0"/>
+            <a:lumOff val="0"/>
+            <a:alphaOff val="0"/>
+          </a:schemeClr>
+        </a:solidFill>
+        <a:ln w="19050" cap="flat" cmpd="sng" algn="ctr">
+          <a:solidFill>
+            <a:schemeClr val="lt1">
+              <a:hueOff val="0"/>
+              <a:satOff val="0"/>
+              <a:lumOff val="0"/>
+              <a:alphaOff val="0"/>
+            </a:schemeClr>
+          </a:solidFill>
+          <a:prstDash val="solid"/>
+          <a:miter lim="800000"/>
+        </a:ln>
+        <a:effectLst/>
+      </dsp:spPr>
+      <dsp:style>
+        <a:lnRef idx="3">
+          <a:scrgbClr r="0" g="0" b="0"/>
+        </a:lnRef>
+        <a:fillRef idx="1">
+          <a:scrgbClr r="0" g="0" b="0"/>
+        </a:fillRef>
+        <a:effectRef idx="1">
+          <a:scrgbClr r="0" g="0" b="0"/>
+        </a:effectRef>
+        <a:fontRef idx="minor">
+          <a:schemeClr val="lt1"/>
+        </a:fontRef>
+      </dsp:style>
+      <dsp:txBody>
+        <a:bodyPr spcFirstLastPara="0" vert="horz" wrap="square" lIns="117348" tIns="58674" rIns="29337" bIns="58674" numCol="1" spcCol="1270" anchor="ctr" anchorCtr="0">
+          <a:noAutofit/>
+        </a:bodyPr>
+        <a:lstStyle/>
+        <a:p>
+          <a:pPr marL="0" lvl="0" indent="0" algn="ctr" defTabSz="977900">
+            <a:lnSpc>
+              <a:spcPct val="90000"/>
+            </a:lnSpc>
+            <a:spcBef>
+              <a:spcPct val="0"/>
+            </a:spcBef>
+            <a:spcAft>
+              <a:spcPct val="35000"/>
+            </a:spcAft>
+            <a:buNone/>
+          </a:pPr>
+          <a:r>
+            <a:rPr lang="en-US" sz="2200" kern="1200"/>
+            <a:t>app</a:t>
+          </a:r>
+        </a:p>
+      </dsp:txBody>
+      <dsp:txXfrm>
+        <a:off x="3285" y="1516335"/>
+        <a:ext cx="2966999" cy="1318666"/>
+      </dsp:txXfrm>
+    </dsp:sp>
+    <dsp:sp modelId="{4B52AF6D-0B18-47CB-9169-D57FF78B69F0}">
+      <dsp:nvSpPr>
+        <dsp:cNvPr id="0" name=""/>
+        <dsp:cNvSpPr/>
+      </dsp:nvSpPr>
+      <dsp:spPr>
+        <a:xfrm>
+          <a:off x="2640618" y="1516335"/>
+          <a:ext cx="3296665" cy="1318666"/>
+        </a:xfrm>
+        <a:prstGeom prst="chevron">
+          <a:avLst/>
+        </a:prstGeom>
+        <a:solidFill>
+          <a:schemeClr val="accent3">
+            <a:hueOff val="0"/>
+            <a:satOff val="0"/>
+            <a:lumOff val="0"/>
+            <a:alphaOff val="0"/>
+          </a:schemeClr>
+        </a:solidFill>
+        <a:ln w="19050" cap="flat" cmpd="sng" algn="ctr">
+          <a:solidFill>
+            <a:schemeClr val="lt1">
+              <a:hueOff val="0"/>
+              <a:satOff val="0"/>
+              <a:lumOff val="0"/>
+              <a:alphaOff val="0"/>
+            </a:schemeClr>
+          </a:solidFill>
+          <a:prstDash val="solid"/>
+          <a:miter lim="800000"/>
+        </a:ln>
+        <a:effectLst/>
+      </dsp:spPr>
+      <dsp:style>
+        <a:lnRef idx="3">
+          <a:scrgbClr r="0" g="0" b="0"/>
+        </a:lnRef>
+        <a:fillRef idx="1">
+          <a:scrgbClr r="0" g="0" b="0"/>
+        </a:fillRef>
+        <a:effectRef idx="1">
+          <a:scrgbClr r="0" g="0" b="0"/>
+        </a:effectRef>
+        <a:fontRef idx="minor">
+          <a:schemeClr val="lt1"/>
+        </a:fontRef>
+      </dsp:style>
+      <dsp:txBody>
+        <a:bodyPr spcFirstLastPara="0" vert="horz" wrap="square" lIns="88011" tIns="58674" rIns="29337" bIns="58674" numCol="1" spcCol="1270" anchor="ctr" anchorCtr="0">
+          <a:noAutofit/>
+        </a:bodyPr>
+        <a:lstStyle/>
+        <a:p>
+          <a:pPr marL="0" lvl="0" indent="0" algn="ctr" defTabSz="977900">
+            <a:lnSpc>
+              <a:spcPct val="90000"/>
+            </a:lnSpc>
+            <a:spcBef>
+              <a:spcPct val="0"/>
+            </a:spcBef>
+            <a:spcAft>
+              <a:spcPct val="35000"/>
+            </a:spcAft>
+            <a:buNone/>
+          </a:pPr>
+          <a:r>
+            <a:rPr lang="en-US" sz="2200" kern="1200"/>
+            <a:t>db</a:t>
+          </a:r>
+        </a:p>
+      </dsp:txBody>
+      <dsp:txXfrm>
+        <a:off x="3299951" y="1516335"/>
+        <a:ext cx="1977999" cy="1318666"/>
+      </dsp:txXfrm>
+    </dsp:sp>
+    <dsp:sp modelId="{9FADA234-2674-40A6-BF7E-BDEF475EE797}">
+      <dsp:nvSpPr>
+        <dsp:cNvPr id="0" name=""/>
+        <dsp:cNvSpPr/>
+      </dsp:nvSpPr>
+      <dsp:spPr>
+        <a:xfrm>
+          <a:off x="5277950" y="1516335"/>
+          <a:ext cx="3296665" cy="1318666"/>
+        </a:xfrm>
+        <a:prstGeom prst="chevron">
+          <a:avLst/>
+        </a:prstGeom>
+        <a:solidFill>
+          <a:schemeClr val="accent3">
+            <a:hueOff val="0"/>
+            <a:satOff val="0"/>
+            <a:lumOff val="0"/>
+            <a:alphaOff val="0"/>
+          </a:schemeClr>
+        </a:solidFill>
+        <a:ln w="19050" cap="flat" cmpd="sng" algn="ctr">
+          <a:solidFill>
+            <a:schemeClr val="lt1">
+              <a:hueOff val="0"/>
+              <a:satOff val="0"/>
+              <a:lumOff val="0"/>
+              <a:alphaOff val="0"/>
+            </a:schemeClr>
+          </a:solidFill>
+          <a:prstDash val="solid"/>
+          <a:miter lim="800000"/>
+        </a:ln>
+        <a:effectLst/>
+      </dsp:spPr>
+      <dsp:style>
+        <a:lnRef idx="3">
+          <a:scrgbClr r="0" g="0" b="0"/>
+        </a:lnRef>
+        <a:fillRef idx="1">
+          <a:scrgbClr r="0" g="0" b="0"/>
+        </a:fillRef>
+        <a:effectRef idx="1">
+          <a:scrgbClr r="0" g="0" b="0"/>
+        </a:effectRef>
+        <a:fontRef idx="minor">
+          <a:schemeClr val="lt1"/>
+        </a:fontRef>
+      </dsp:style>
+      <dsp:txBody>
+        <a:bodyPr spcFirstLastPara="0" vert="horz" wrap="square" lIns="88011" tIns="58674" rIns="29337" bIns="58674" numCol="1" spcCol="1270" anchor="ctr" anchorCtr="0">
+          <a:noAutofit/>
+        </a:bodyPr>
+        <a:lstStyle/>
+        <a:p>
+          <a:pPr marL="0" lvl="0" indent="0" algn="ctr" defTabSz="977900">
+            <a:lnSpc>
+              <a:spcPct val="90000"/>
+            </a:lnSpc>
+            <a:spcBef>
+              <a:spcPct val="0"/>
+            </a:spcBef>
+            <a:spcAft>
+              <a:spcPct val="35000"/>
+            </a:spcAft>
+            <a:buNone/>
+          </a:pPr>
+          <a:r>
+            <a:rPr lang="en-US" sz="2200" kern="1200"/>
+            <a:t>srv</a:t>
+          </a:r>
+        </a:p>
+      </dsp:txBody>
+      <dsp:txXfrm>
+        <a:off x="5937283" y="1516335"/>
+        <a:ext cx="1977999" cy="1318666"/>
+      </dsp:txXfrm>
+    </dsp:sp>
+    <dsp:sp modelId="{A5D8406F-B53B-46ED-8A4F-AB186B6071B9}">
+      <dsp:nvSpPr>
+        <dsp:cNvPr id="0" name=""/>
+        <dsp:cNvSpPr/>
+      </dsp:nvSpPr>
+      <dsp:spPr>
+        <a:xfrm>
+          <a:off x="7915283" y="1516335"/>
+          <a:ext cx="3296665" cy="1318666"/>
+        </a:xfrm>
+        <a:prstGeom prst="chevron">
+          <a:avLst/>
+        </a:prstGeom>
+        <a:solidFill>
+          <a:schemeClr val="accent3">
+            <a:hueOff val="0"/>
+            <a:satOff val="0"/>
+            <a:lumOff val="0"/>
+            <a:alphaOff val="0"/>
+          </a:schemeClr>
+        </a:solidFill>
+        <a:ln w="19050" cap="flat" cmpd="sng" algn="ctr">
+          <a:solidFill>
+            <a:schemeClr val="lt1">
+              <a:hueOff val="0"/>
+              <a:satOff val="0"/>
+              <a:lumOff val="0"/>
+              <a:alphaOff val="0"/>
+            </a:schemeClr>
+          </a:solidFill>
+          <a:prstDash val="solid"/>
+          <a:miter lim="800000"/>
+        </a:ln>
+        <a:effectLst/>
+      </dsp:spPr>
+      <dsp:style>
+        <a:lnRef idx="3">
+          <a:scrgbClr r="0" g="0" b="0"/>
+        </a:lnRef>
+        <a:fillRef idx="1">
+          <a:scrgbClr r="0" g="0" b="0"/>
+        </a:fillRef>
+        <a:effectRef idx="1">
+          <a:scrgbClr r="0" g="0" b="0"/>
+        </a:effectRef>
+        <a:fontRef idx="minor">
+          <a:schemeClr val="lt1"/>
+        </a:fontRef>
+      </dsp:style>
+      <dsp:txBody>
+        <a:bodyPr spcFirstLastPara="0" vert="horz" wrap="square" lIns="88011" tIns="58674" rIns="29337" bIns="58674" numCol="1" spcCol="1270" anchor="ctr" anchorCtr="0">
+          <a:noAutofit/>
+        </a:bodyPr>
+        <a:lstStyle/>
+        <a:p>
+          <a:pPr marL="0" lvl="0" indent="0" algn="ctr" defTabSz="977900">
+            <a:lnSpc>
+              <a:spcPct val="90000"/>
+            </a:lnSpc>
+            <a:spcBef>
+              <a:spcPct val="0"/>
+            </a:spcBef>
+            <a:spcAft>
+              <a:spcPct val="35000"/>
+            </a:spcAft>
+            <a:buNone/>
+          </a:pPr>
+          <a:r>
+            <a:rPr lang="en-US" sz="2200" kern="1200"/>
+            <a:t>packagse.json</a:t>
+          </a:r>
+        </a:p>
+      </dsp:txBody>
+      <dsp:txXfrm>
+        <a:off x="8574616" y="1516335"/>
+        <a:ext cx="1977999" cy="1318666"/>
+      </dsp:txXfrm>
+    </dsp:sp>
+  </dsp:spTree>
+</dsp:drawing>
+</file>
+
 <file path=ppt/diagrams/layout1.xml><?xml version="1.0" encoding="utf-8"?>
 <dgm:layoutDef xmlns:dgm="http://schemas.openxmlformats.org/drawingml/2006/diagram" xmlns:a="http://schemas.openxmlformats.org/drawingml/2006/main" uniqueId="urn:microsoft.com/office/officeart/2018/2/layout/IconVerticalSolidList">
   <dgm:title val="Icon Vertical Solid List"/>
@@ -1720,6 +3037,278 @@
       </dgm1612:lstStyle>
     </a:ext>
   </dgm:extLst>
+</dgm:layoutDef>
+</file>
+
+<file path=ppt/diagrams/layout2.xml><?xml version="1.0" encoding="utf-8"?>
+<dgm:layoutDef xmlns:dgm="http://schemas.openxmlformats.org/drawingml/2006/diagram" xmlns:a="http://schemas.openxmlformats.org/drawingml/2006/main" uniqueId="urn:microsoft.com/office/officeart/2005/8/layout/hChevron3">
+  <dgm:title val=""/>
+  <dgm:desc val=""/>
+  <dgm:catLst>
+    <dgm:cat type="process" pri="10000"/>
+  </dgm:catLst>
+  <dgm:sampData useDef="1">
+    <dgm:dataModel>
+      <dgm:ptLst/>
+      <dgm:bg/>
+      <dgm:whole/>
+    </dgm:dataModel>
+  </dgm:sampData>
+  <dgm:styleData>
+    <dgm:dataModel>
+      <dgm:ptLst>
+        <dgm:pt modelId="0" type="doc"/>
+        <dgm:pt modelId="1"/>
+        <dgm:pt modelId="2"/>
+      </dgm:ptLst>
+      <dgm:cxnLst>
+        <dgm:cxn modelId="3" srcId="0" destId="1" srcOrd="0" destOrd="0"/>
+        <dgm:cxn modelId="4" srcId="0" destId="2" srcOrd="1" destOrd="0"/>
+      </dgm:cxnLst>
+      <dgm:bg/>
+      <dgm:whole/>
+    </dgm:dataModel>
+  </dgm:styleData>
+  <dgm:clrData>
+    <dgm:dataModel>
+      <dgm:ptLst>
+        <dgm:pt modelId="0" type="doc"/>
+        <dgm:pt modelId="1"/>
+        <dgm:pt modelId="2"/>
+        <dgm:pt modelId="3"/>
+        <dgm:pt modelId="4"/>
+      </dgm:ptLst>
+      <dgm:cxnLst>
+        <dgm:cxn modelId="5" srcId="0" destId="1" srcOrd="0" destOrd="0"/>
+        <dgm:cxn modelId="6" srcId="0" destId="2" srcOrd="1" destOrd="0"/>
+        <dgm:cxn modelId="7" srcId="0" destId="3" srcOrd="2" destOrd="0"/>
+        <dgm:cxn modelId="8" srcId="0" destId="4" srcOrd="3" destOrd="0"/>
+      </dgm:cxnLst>
+      <dgm:bg/>
+      <dgm:whole/>
+    </dgm:dataModel>
+  </dgm:clrData>
+  <dgm:layoutNode name="Name0">
+    <dgm:varLst>
+      <dgm:dir/>
+      <dgm:resizeHandles val="exact"/>
+    </dgm:varLst>
+    <dgm:choose name="Name1">
+      <dgm:if name="Name2" func="var" arg="dir" op="equ" val="norm">
+        <dgm:alg type="lin"/>
+      </dgm:if>
+      <dgm:else name="Name3">
+        <dgm:alg type="lin">
+          <dgm:param type="linDir" val="fromR"/>
+        </dgm:alg>
+      </dgm:else>
+    </dgm:choose>
+    <dgm:shape xmlns:r="http://schemas.openxmlformats.org/officeDocument/2006/relationships" r:blip="">
+      <dgm:adjLst/>
+    </dgm:shape>
+    <dgm:presOf/>
+    <dgm:choose name="Name4">
+      <dgm:if name="Name5" axis="root des" func="maxDepth" op="gte" val="2">
+        <dgm:constrLst>
+          <dgm:constr type="w" for="ch" forName="parAndChTx" refType="w"/>
+          <dgm:constr type="primFontSz" for="ch" ptType="node" op="equ"/>
+          <dgm:constr type="w" for="ch" forName="parAndChSpace" refType="w" refFor="ch" refForName="parAndChTx" fact="-0.2"/>
+          <dgm:constr type="w" for="ch" ptType="sibTrans" op="equ"/>
+        </dgm:constrLst>
+        <dgm:ruleLst/>
+        <dgm:forEach name="Name6" axis="ch" ptType="node">
+          <dgm:layoutNode name="parAndChTx">
+            <dgm:varLst>
+              <dgm:bulletEnabled val="1"/>
+            </dgm:varLst>
+            <dgm:alg type="tx"/>
+            <dgm:choose name="Name7">
+              <dgm:if name="Name8" func="var" arg="dir" op="equ" val="norm">
+                <dgm:choose name="Name9">
+                  <dgm:if name="Name10" axis="self" ptType="node" func="pos" op="equ" val="1">
+                    <dgm:shape xmlns:r="http://schemas.openxmlformats.org/officeDocument/2006/relationships" type="homePlate" r:blip="">
+                      <dgm:adjLst>
+                        <dgm:adj idx="1" val="0.25"/>
+                      </dgm:adjLst>
+                    </dgm:shape>
+                    <dgm:presOf axis="desOrSelf" ptType="node"/>
+                    <dgm:constrLst>
+                      <dgm:constr type="h" refType="w" op="equ" fact="0.8"/>
+                      <dgm:constr type="primFontSz" val="65"/>
+                      <dgm:constr type="tMarg" refType="primFontSz" fact="0.2"/>
+                      <dgm:constr type="bMarg" refType="primFontSz" fact="0.2"/>
+                      <dgm:constr type="lMarg" refType="w" fact="0.1"/>
+                      <dgm:constr type="rMarg" refType="w" fact="0.4"/>
+                    </dgm:constrLst>
+                  </dgm:if>
+                  <dgm:else name="Name11">
+                    <dgm:shape xmlns:r="http://schemas.openxmlformats.org/officeDocument/2006/relationships" type="chevron" r:blip="">
+                      <dgm:adjLst>
+                        <dgm:adj idx="1" val="0.25"/>
+                      </dgm:adjLst>
+                    </dgm:shape>
+                    <dgm:presOf axis="desOrSelf" ptType="node"/>
+                    <dgm:constrLst>
+                      <dgm:constr type="h" refType="w" op="equ" fact="0.8"/>
+                      <dgm:constr type="primFontSz" val="65"/>
+                      <dgm:constr type="tMarg" refType="primFontSz" fact="0.2"/>
+                      <dgm:constr type="bMarg" refType="primFontSz" fact="0.2"/>
+                      <dgm:constr type="lMarg" refType="w" fact="0.1"/>
+                      <dgm:constr type="rMarg" refType="w" fact="0.1"/>
+                    </dgm:constrLst>
+                  </dgm:else>
+                </dgm:choose>
+              </dgm:if>
+              <dgm:else name="Name12">
+                <dgm:choose name="Name13">
+                  <dgm:if name="Name14" axis="self" ptType="node" func="pos" op="equ" val="1">
+                    <dgm:shape xmlns:r="http://schemas.openxmlformats.org/officeDocument/2006/relationships" rot="180" type="homePlate" r:blip="">
+                      <dgm:adjLst>
+                        <dgm:adj idx="1" val="0.25"/>
+                      </dgm:adjLst>
+                    </dgm:shape>
+                    <dgm:presOf axis="desOrSelf" ptType="node"/>
+                    <dgm:constrLst>
+                      <dgm:constr type="h" refType="w" op="equ" fact="0.8"/>
+                      <dgm:constr type="primFontSz" val="65"/>
+                      <dgm:constr type="tMarg" refType="primFontSz" fact="0.2"/>
+                      <dgm:constr type="bMarg" refType="primFontSz" fact="0.2"/>
+                      <dgm:constr type="lMarg" refType="w" fact="0.4"/>
+                      <dgm:constr type="rMarg" refType="w" fact="0.1"/>
+                    </dgm:constrLst>
+                  </dgm:if>
+                  <dgm:else name="Name15">
+                    <dgm:shape xmlns:r="http://schemas.openxmlformats.org/officeDocument/2006/relationships" rot="180" type="chevron" r:blip="">
+                      <dgm:adjLst>
+                        <dgm:adj idx="1" val="0.25"/>
+                      </dgm:adjLst>
+                    </dgm:shape>
+                    <dgm:presOf axis="desOrSelf" ptType="node"/>
+                    <dgm:constrLst>
+                      <dgm:constr type="h" refType="w" op="equ" fact="0.8"/>
+                      <dgm:constr type="primFontSz" val="65"/>
+                      <dgm:constr type="tMarg" refType="primFontSz" fact="0.2"/>
+                      <dgm:constr type="bMarg" refType="primFontSz" fact="0.2"/>
+                      <dgm:constr type="lMarg" refType="w" fact="0.1"/>
+                      <dgm:constr type="rMarg" refType="w" fact="0.1"/>
+                    </dgm:constrLst>
+                  </dgm:else>
+                </dgm:choose>
+              </dgm:else>
+            </dgm:choose>
+            <dgm:ruleLst>
+              <dgm:rule type="primFontSz" val="5" fact="NaN" max="NaN"/>
+            </dgm:ruleLst>
+          </dgm:layoutNode>
+          <dgm:forEach name="Name16" axis="followSib" ptType="sibTrans" cnt="1">
+            <dgm:layoutNode name="parAndChSpace">
+              <dgm:alg type="sp"/>
+              <dgm:shape xmlns:r="http://schemas.openxmlformats.org/officeDocument/2006/relationships" r:blip="">
+                <dgm:adjLst/>
+              </dgm:shape>
+              <dgm:presOf/>
+              <dgm:constrLst/>
+              <dgm:ruleLst/>
+            </dgm:layoutNode>
+          </dgm:forEach>
+        </dgm:forEach>
+      </dgm:if>
+      <dgm:else name="Name17">
+        <dgm:constrLst>
+          <dgm:constr type="w" for="ch" forName="parTxOnly" refType="w"/>
+          <dgm:constr type="primFontSz" for="ch" ptType="node" op="equ"/>
+          <dgm:constr type="w" for="ch" forName="parSpace" refType="w" refFor="ch" refForName="parTxOnly" fact="-0.2"/>
+          <dgm:constr type="w" for="ch" ptType="sibTrans" op="equ"/>
+        </dgm:constrLst>
+        <dgm:ruleLst/>
+        <dgm:forEach name="Name18" axis="ch" ptType="node">
+          <dgm:layoutNode name="parTxOnly">
+            <dgm:varLst>
+              <dgm:bulletEnabled val="1"/>
+            </dgm:varLst>
+            <dgm:alg type="tx"/>
+            <dgm:presOf axis="desOrSelf" ptType="node"/>
+            <dgm:choose name="Name19">
+              <dgm:if name="Name20" func="var" arg="dir" op="equ" val="norm">
+                <dgm:choose name="Name21">
+                  <dgm:if name="Name22" axis="self" ptType="node" func="pos" op="equ" val="1">
+                    <dgm:shape xmlns:r="http://schemas.openxmlformats.org/officeDocument/2006/relationships" type="homePlate" r:blip="">
+                      <dgm:adjLst/>
+                    </dgm:shape>
+                    <dgm:constrLst>
+                      <dgm:constr type="h" refType="w" op="equ" fact="0.4"/>
+                      <dgm:constr type="primFontSz" val="65"/>
+                      <dgm:constr type="tMarg" refType="primFontSz" fact="0.21"/>
+                      <dgm:constr type="bMarg" refType="primFontSz" fact="0.21"/>
+                      <dgm:constr type="lMarg" refType="primFontSz" fact="0.42"/>
+                      <dgm:constr type="rMarg" refType="primFontSz" fact="0.105"/>
+                    </dgm:constrLst>
+                  </dgm:if>
+                  <dgm:else name="Name23">
+                    <dgm:shape xmlns:r="http://schemas.openxmlformats.org/officeDocument/2006/relationships" type="chevron" r:blip="">
+                      <dgm:adjLst/>
+                    </dgm:shape>
+                    <dgm:constrLst>
+                      <dgm:constr type="h" refType="w" op="equ" fact="0.4"/>
+                      <dgm:constr type="primFontSz" val="65"/>
+                      <dgm:constr type="tMarg" refType="primFontSz" fact="0.21"/>
+                      <dgm:constr type="bMarg" refType="primFontSz" fact="0.21"/>
+                      <dgm:constr type="lMarg" refType="primFontSz" fact="0.315"/>
+                      <dgm:constr type="rMarg" refType="primFontSz" fact="0.105"/>
+                    </dgm:constrLst>
+                  </dgm:else>
+                </dgm:choose>
+              </dgm:if>
+              <dgm:else name="Name24">
+                <dgm:choose name="Name25">
+                  <dgm:if name="Name26" axis="self" ptType="node" func="pos" op="equ" val="1">
+                    <dgm:shape xmlns:r="http://schemas.openxmlformats.org/officeDocument/2006/relationships" rot="180" type="homePlate" r:blip="">
+                      <dgm:adjLst/>
+                    </dgm:shape>
+                    <dgm:constrLst>
+                      <dgm:constr type="h" refType="w" op="equ" fact="0.4"/>
+                      <dgm:constr type="primFontSz" val="65"/>
+                      <dgm:constr type="tMarg" refType="primFontSz" fact="0.21"/>
+                      <dgm:constr type="bMarg" refType="primFontSz" fact="0.21"/>
+                      <dgm:constr type="lMarg" refType="primFontSz" fact="0.105"/>
+                      <dgm:constr type="rMarg" refType="primFontSz" fact="0.42"/>
+                    </dgm:constrLst>
+                  </dgm:if>
+                  <dgm:else name="Name27">
+                    <dgm:shape xmlns:r="http://schemas.openxmlformats.org/officeDocument/2006/relationships" rot="180" type="chevron" r:blip="">
+                      <dgm:adjLst/>
+                    </dgm:shape>
+                    <dgm:constrLst>
+                      <dgm:constr type="h" refType="w" op="equ" fact="0.4"/>
+                      <dgm:constr type="primFontSz" val="65"/>
+                      <dgm:constr type="tMarg" refType="primFontSz" fact="0.21"/>
+                      <dgm:constr type="bMarg" refType="primFontSz" fact="0.21"/>
+                      <dgm:constr type="lMarg" refType="primFontSz" fact="0.105"/>
+                      <dgm:constr type="rMarg" refType="primFontSz" fact="0.315"/>
+                    </dgm:constrLst>
+                  </dgm:else>
+                </dgm:choose>
+              </dgm:else>
+            </dgm:choose>
+            <dgm:ruleLst>
+              <dgm:rule type="primFontSz" val="5" fact="NaN" max="NaN"/>
+            </dgm:ruleLst>
+          </dgm:layoutNode>
+          <dgm:forEach name="Name28" axis="followSib" ptType="sibTrans" cnt="1">
+            <dgm:layoutNode name="parSpace">
+              <dgm:alg type="sp"/>
+              <dgm:shape xmlns:r="http://schemas.openxmlformats.org/officeDocument/2006/relationships" r:blip="">
+                <dgm:adjLst/>
+              </dgm:shape>
+              <dgm:presOf/>
+              <dgm:constrLst/>
+              <dgm:ruleLst/>
+            </dgm:layoutNode>
+          </dgm:forEach>
+        </dgm:forEach>
+      </dgm:else>
+    </dgm:choose>
+  </dgm:layoutNode>
 </dgm:layoutDef>
 </file>
 
@@ -2757,6 +4346,1040 @@
 </dgm:styleDef>
 </file>
 
+<file path=ppt/diagrams/quickStyle2.xml><?xml version="1.0" encoding="utf-8"?>
+<dgm:styleDef xmlns:dgm="http://schemas.openxmlformats.org/drawingml/2006/diagram" xmlns:a="http://schemas.openxmlformats.org/drawingml/2006/main" uniqueId="urn:microsoft.com/office/officeart/2005/8/quickstyle/simple2">
+  <dgm:title val=""/>
+  <dgm:desc val=""/>
+  <dgm:catLst>
+    <dgm:cat type="simple" pri="10200"/>
+  </dgm:catLst>
+  <dgm:scene3d>
+    <a:camera prst="orthographicFront"/>
+    <a:lightRig rig="threePt" dir="t"/>
+  </dgm:scene3d>
+  <dgm:styleLbl name="node0">
+    <dgm:scene3d>
+      <a:camera prst="orthographicFront"/>
+      <a:lightRig rig="threePt" dir="t"/>
+    </dgm:scene3d>
+    <dgm:sp3d/>
+    <dgm:txPr/>
+    <dgm:style>
+      <a:lnRef idx="3">
+        <a:scrgbClr r="0" g="0" b="0"/>
+      </a:lnRef>
+      <a:fillRef idx="1">
+        <a:scrgbClr r="0" g="0" b="0"/>
+      </a:fillRef>
+      <a:effectRef idx="1">
+        <a:scrgbClr r="0" g="0" b="0"/>
+      </a:effectRef>
+      <a:fontRef idx="minor">
+        <a:schemeClr val="lt1"/>
+      </a:fontRef>
+    </dgm:style>
+  </dgm:styleLbl>
+  <dgm:styleLbl name="lnNode1">
+    <dgm:scene3d>
+      <a:camera prst="orthographicFront"/>
+      <a:lightRig rig="threePt" dir="t"/>
+    </dgm:scene3d>
+    <dgm:sp3d/>
+    <dgm:txPr/>
+    <dgm:style>
+      <a:lnRef idx="3">
+        <a:scrgbClr r="0" g="0" b="0"/>
+      </a:lnRef>
+      <a:fillRef idx="1">
+        <a:scrgbClr r="0" g="0" b="0"/>
+      </a:fillRef>
+      <a:effectRef idx="1">
+        <a:scrgbClr r="0" g="0" b="0"/>
+      </a:effectRef>
+      <a:fontRef idx="minor">
+        <a:schemeClr val="lt1"/>
+      </a:fontRef>
+    </dgm:style>
+  </dgm:styleLbl>
+  <dgm:styleLbl name="vennNode1">
+    <dgm:scene3d>
+      <a:camera prst="orthographicFront"/>
+      <a:lightRig rig="threePt" dir="t"/>
+    </dgm:scene3d>
+    <dgm:sp3d/>
+    <dgm:txPr/>
+    <dgm:style>
+      <a:lnRef idx="3">
+        <a:scrgbClr r="0" g="0" b="0"/>
+      </a:lnRef>
+      <a:fillRef idx="1">
+        <a:scrgbClr r="0" g="0" b="0"/>
+      </a:fillRef>
+      <a:effectRef idx="0">
+        <a:scrgbClr r="0" g="0" b="0"/>
+      </a:effectRef>
+      <a:fontRef idx="minor">
+        <a:schemeClr val="tx1"/>
+      </a:fontRef>
+    </dgm:style>
+  </dgm:styleLbl>
+  <dgm:styleLbl name="alignNode1">
+    <dgm:scene3d>
+      <a:camera prst="orthographicFront"/>
+      <a:lightRig rig="threePt" dir="t"/>
+    </dgm:scene3d>
+    <dgm:sp3d/>
+    <dgm:txPr/>
+    <dgm:style>
+      <a:lnRef idx="2">
+        <a:scrgbClr r="0" g="0" b="0"/>
+      </a:lnRef>
+      <a:fillRef idx="1">
+        <a:scrgbClr r="0" g="0" b="0"/>
+      </a:fillRef>
+      <a:effectRef idx="1">
+        <a:scrgbClr r="0" g="0" b="0"/>
+      </a:effectRef>
+      <a:fontRef idx="minor">
+        <a:schemeClr val="lt1"/>
+      </a:fontRef>
+    </dgm:style>
+  </dgm:styleLbl>
+  <dgm:styleLbl name="node1">
+    <dgm:scene3d>
+      <a:camera prst="orthographicFront"/>
+      <a:lightRig rig="threePt" dir="t"/>
+    </dgm:scene3d>
+    <dgm:sp3d/>
+    <dgm:txPr/>
+    <dgm:style>
+      <a:lnRef idx="3">
+        <a:scrgbClr r="0" g="0" b="0"/>
+      </a:lnRef>
+      <a:fillRef idx="1">
+        <a:scrgbClr r="0" g="0" b="0"/>
+      </a:fillRef>
+      <a:effectRef idx="1">
+        <a:scrgbClr r="0" g="0" b="0"/>
+      </a:effectRef>
+      <a:fontRef idx="minor">
+        <a:schemeClr val="lt1"/>
+      </a:fontRef>
+    </dgm:style>
+  </dgm:styleLbl>
+  <dgm:styleLbl name="node2">
+    <dgm:scene3d>
+      <a:camera prst="orthographicFront"/>
+      <a:lightRig rig="threePt" dir="t"/>
+    </dgm:scene3d>
+    <dgm:sp3d/>
+    <dgm:txPr/>
+    <dgm:style>
+      <a:lnRef idx="3">
+        <a:scrgbClr r="0" g="0" b="0"/>
+      </a:lnRef>
+      <a:fillRef idx="1">
+        <a:scrgbClr r="0" g="0" b="0"/>
+      </a:fillRef>
+      <a:effectRef idx="1">
+        <a:scrgbClr r="0" g="0" b="0"/>
+      </a:effectRef>
+      <a:fontRef idx="minor">
+        <a:schemeClr val="lt1"/>
+      </a:fontRef>
+    </dgm:style>
+  </dgm:styleLbl>
+  <dgm:styleLbl name="node3">
+    <dgm:scene3d>
+      <a:camera prst="orthographicFront"/>
+      <a:lightRig rig="threePt" dir="t"/>
+    </dgm:scene3d>
+    <dgm:sp3d/>
+    <dgm:txPr/>
+    <dgm:style>
+      <a:lnRef idx="3">
+        <a:scrgbClr r="0" g="0" b="0"/>
+      </a:lnRef>
+      <a:fillRef idx="1">
+        <a:scrgbClr r="0" g="0" b="0"/>
+      </a:fillRef>
+      <a:effectRef idx="1">
+        <a:scrgbClr r="0" g="0" b="0"/>
+      </a:effectRef>
+      <a:fontRef idx="minor">
+        <a:schemeClr val="lt1"/>
+      </a:fontRef>
+    </dgm:style>
+  </dgm:styleLbl>
+  <dgm:styleLbl name="node4">
+    <dgm:scene3d>
+      <a:camera prst="orthographicFront"/>
+      <a:lightRig rig="threePt" dir="t"/>
+    </dgm:scene3d>
+    <dgm:sp3d/>
+    <dgm:txPr/>
+    <dgm:style>
+      <a:lnRef idx="3">
+        <a:scrgbClr r="0" g="0" b="0"/>
+      </a:lnRef>
+      <a:fillRef idx="1">
+        <a:scrgbClr r="0" g="0" b="0"/>
+      </a:fillRef>
+      <a:effectRef idx="1">
+        <a:scrgbClr r="0" g="0" b="0"/>
+      </a:effectRef>
+      <a:fontRef idx="minor">
+        <a:schemeClr val="lt1"/>
+      </a:fontRef>
+    </dgm:style>
+  </dgm:styleLbl>
+  <dgm:styleLbl name="fgImgPlace1">
+    <dgm:scene3d>
+      <a:camera prst="orthographicFront"/>
+      <a:lightRig rig="threePt" dir="t"/>
+    </dgm:scene3d>
+    <dgm:sp3d/>
+    <dgm:txPr/>
+    <dgm:style>
+      <a:lnRef idx="3">
+        <a:scrgbClr r="0" g="0" b="0"/>
+      </a:lnRef>
+      <a:fillRef idx="1">
+        <a:scrgbClr r="0" g="0" b="0"/>
+      </a:fillRef>
+      <a:effectRef idx="1">
+        <a:scrgbClr r="0" g="0" b="0"/>
+      </a:effectRef>
+      <a:fontRef idx="minor"/>
+    </dgm:style>
+  </dgm:styleLbl>
+  <dgm:styleLbl name="alignImgPlace1">
+    <dgm:scene3d>
+      <a:camera prst="orthographicFront"/>
+      <a:lightRig rig="threePt" dir="t"/>
+    </dgm:scene3d>
+    <dgm:sp3d/>
+    <dgm:txPr/>
+    <dgm:style>
+      <a:lnRef idx="3">
+        <a:scrgbClr r="0" g="0" b="0"/>
+      </a:lnRef>
+      <a:fillRef idx="1">
+        <a:scrgbClr r="0" g="0" b="0"/>
+      </a:fillRef>
+      <a:effectRef idx="1">
+        <a:scrgbClr r="0" g="0" b="0"/>
+      </a:effectRef>
+      <a:fontRef idx="minor"/>
+    </dgm:style>
+  </dgm:styleLbl>
+  <dgm:styleLbl name="bgImgPlace1">
+    <dgm:scene3d>
+      <a:camera prst="orthographicFront"/>
+      <a:lightRig rig="threePt" dir="t"/>
+    </dgm:scene3d>
+    <dgm:sp3d/>
+    <dgm:txPr/>
+    <dgm:style>
+      <a:lnRef idx="3">
+        <a:scrgbClr r="0" g="0" b="0"/>
+      </a:lnRef>
+      <a:fillRef idx="1">
+        <a:scrgbClr r="0" g="0" b="0"/>
+      </a:fillRef>
+      <a:effectRef idx="1">
+        <a:scrgbClr r="0" g="0" b="0"/>
+      </a:effectRef>
+      <a:fontRef idx="minor"/>
+    </dgm:style>
+  </dgm:styleLbl>
+  <dgm:styleLbl name="sibTrans2D1">
+    <dgm:scene3d>
+      <a:camera prst="orthographicFront"/>
+      <a:lightRig rig="threePt" dir="t"/>
+    </dgm:scene3d>
+    <dgm:sp3d/>
+    <dgm:txPr/>
+    <dgm:style>
+      <a:lnRef idx="0">
+        <a:scrgbClr r="0" g="0" b="0"/>
+      </a:lnRef>
+      <a:fillRef idx="1">
+        <a:scrgbClr r="0" g="0" b="0"/>
+      </a:fillRef>
+      <a:effectRef idx="1">
+        <a:scrgbClr r="0" g="0" b="0"/>
+      </a:effectRef>
+      <a:fontRef idx="minor">
+        <a:schemeClr val="lt1"/>
+      </a:fontRef>
+    </dgm:style>
+  </dgm:styleLbl>
+  <dgm:styleLbl name="fgSibTrans2D1">
+    <dgm:scene3d>
+      <a:camera prst="orthographicFront"/>
+      <a:lightRig rig="threePt" dir="t"/>
+    </dgm:scene3d>
+    <dgm:sp3d/>
+    <dgm:txPr/>
+    <dgm:style>
+      <a:lnRef idx="0">
+        <a:scrgbClr r="0" g="0" b="0"/>
+      </a:lnRef>
+      <a:fillRef idx="1">
+        <a:scrgbClr r="0" g="0" b="0"/>
+      </a:fillRef>
+      <a:effectRef idx="1">
+        <a:scrgbClr r="0" g="0" b="0"/>
+      </a:effectRef>
+      <a:fontRef idx="minor">
+        <a:schemeClr val="lt1"/>
+      </a:fontRef>
+    </dgm:style>
+  </dgm:styleLbl>
+  <dgm:styleLbl name="bgSibTrans2D1">
+    <dgm:scene3d>
+      <a:camera prst="orthographicFront"/>
+      <a:lightRig rig="threePt" dir="t"/>
+    </dgm:scene3d>
+    <dgm:sp3d/>
+    <dgm:txPr/>
+    <dgm:style>
+      <a:lnRef idx="0">
+        <a:scrgbClr r="0" g="0" b="0"/>
+      </a:lnRef>
+      <a:fillRef idx="1">
+        <a:scrgbClr r="0" g="0" b="0"/>
+      </a:fillRef>
+      <a:effectRef idx="1">
+        <a:scrgbClr r="0" g="0" b="0"/>
+      </a:effectRef>
+      <a:fontRef idx="minor">
+        <a:schemeClr val="lt1"/>
+      </a:fontRef>
+    </dgm:style>
+  </dgm:styleLbl>
+  <dgm:styleLbl name="sibTrans1D1">
+    <dgm:scene3d>
+      <a:camera prst="orthographicFront"/>
+      <a:lightRig rig="threePt" dir="t"/>
+    </dgm:scene3d>
+    <dgm:sp3d/>
+    <dgm:txPr/>
+    <dgm:style>
+      <a:lnRef idx="1">
+        <a:scrgbClr r="0" g="0" b="0"/>
+      </a:lnRef>
+      <a:fillRef idx="0">
+        <a:scrgbClr r="0" g="0" b="0"/>
+      </a:fillRef>
+      <a:effectRef idx="0">
+        <a:scrgbClr r="0" g="0" b="0"/>
+      </a:effectRef>
+      <a:fontRef idx="minor"/>
+    </dgm:style>
+  </dgm:styleLbl>
+  <dgm:styleLbl name="callout">
+    <dgm:scene3d>
+      <a:camera prst="orthographicFront"/>
+      <a:lightRig rig="threePt" dir="t"/>
+    </dgm:scene3d>
+    <dgm:sp3d/>
+    <dgm:txPr/>
+    <dgm:style>
+      <a:lnRef idx="2">
+        <a:scrgbClr r="0" g="0" b="0"/>
+      </a:lnRef>
+      <a:fillRef idx="1">
+        <a:scrgbClr r="0" g="0" b="0"/>
+      </a:fillRef>
+      <a:effectRef idx="1">
+        <a:scrgbClr r="0" g="0" b="0"/>
+      </a:effectRef>
+      <a:fontRef idx="minor"/>
+    </dgm:style>
+  </dgm:styleLbl>
+  <dgm:styleLbl name="asst0">
+    <dgm:scene3d>
+      <a:camera prst="orthographicFront"/>
+      <a:lightRig rig="threePt" dir="t"/>
+    </dgm:scene3d>
+    <dgm:sp3d/>
+    <dgm:txPr/>
+    <dgm:style>
+      <a:lnRef idx="3">
+        <a:scrgbClr r="0" g="0" b="0"/>
+      </a:lnRef>
+      <a:fillRef idx="1">
+        <a:scrgbClr r="0" g="0" b="0"/>
+      </a:fillRef>
+      <a:effectRef idx="1">
+        <a:scrgbClr r="0" g="0" b="0"/>
+      </a:effectRef>
+      <a:fontRef idx="minor">
+        <a:schemeClr val="lt1"/>
+      </a:fontRef>
+    </dgm:style>
+  </dgm:styleLbl>
+  <dgm:styleLbl name="asst1">
+    <dgm:scene3d>
+      <a:camera prst="orthographicFront"/>
+      <a:lightRig rig="threePt" dir="t"/>
+    </dgm:scene3d>
+    <dgm:sp3d/>
+    <dgm:txPr/>
+    <dgm:style>
+      <a:lnRef idx="3">
+        <a:scrgbClr r="0" g="0" b="0"/>
+      </a:lnRef>
+      <a:fillRef idx="1">
+        <a:scrgbClr r="0" g="0" b="0"/>
+      </a:fillRef>
+      <a:effectRef idx="1">
+        <a:scrgbClr r="0" g="0" b="0"/>
+      </a:effectRef>
+      <a:fontRef idx="minor">
+        <a:schemeClr val="lt1"/>
+      </a:fontRef>
+    </dgm:style>
+  </dgm:styleLbl>
+  <dgm:styleLbl name="asst2">
+    <dgm:scene3d>
+      <a:camera prst="orthographicFront"/>
+      <a:lightRig rig="threePt" dir="t"/>
+    </dgm:scene3d>
+    <dgm:sp3d/>
+    <dgm:txPr/>
+    <dgm:style>
+      <a:lnRef idx="3">
+        <a:scrgbClr r="0" g="0" b="0"/>
+      </a:lnRef>
+      <a:fillRef idx="1">
+        <a:scrgbClr r="0" g="0" b="0"/>
+      </a:fillRef>
+      <a:effectRef idx="1">
+        <a:scrgbClr r="0" g="0" b="0"/>
+      </a:effectRef>
+      <a:fontRef idx="minor">
+        <a:schemeClr val="lt1"/>
+      </a:fontRef>
+    </dgm:style>
+  </dgm:styleLbl>
+  <dgm:styleLbl name="asst3">
+    <dgm:scene3d>
+      <a:camera prst="orthographicFront"/>
+      <a:lightRig rig="threePt" dir="t"/>
+    </dgm:scene3d>
+    <dgm:sp3d/>
+    <dgm:txPr/>
+    <dgm:style>
+      <a:lnRef idx="3">
+        <a:scrgbClr r="0" g="0" b="0"/>
+      </a:lnRef>
+      <a:fillRef idx="1">
+        <a:scrgbClr r="0" g="0" b="0"/>
+      </a:fillRef>
+      <a:effectRef idx="1">
+        <a:scrgbClr r="0" g="0" b="0"/>
+      </a:effectRef>
+      <a:fontRef idx="minor">
+        <a:schemeClr val="lt1"/>
+      </a:fontRef>
+    </dgm:style>
+  </dgm:styleLbl>
+  <dgm:styleLbl name="asst4">
+    <dgm:scene3d>
+      <a:camera prst="orthographicFront"/>
+      <a:lightRig rig="threePt" dir="t"/>
+    </dgm:scene3d>
+    <dgm:sp3d/>
+    <dgm:txPr/>
+    <dgm:style>
+      <a:lnRef idx="3">
+        <a:scrgbClr r="0" g="0" b="0"/>
+      </a:lnRef>
+      <a:fillRef idx="1">
+        <a:scrgbClr r="0" g="0" b="0"/>
+      </a:fillRef>
+      <a:effectRef idx="1">
+        <a:scrgbClr r="0" g="0" b="0"/>
+      </a:effectRef>
+      <a:fontRef idx="minor">
+        <a:schemeClr val="lt1"/>
+      </a:fontRef>
+    </dgm:style>
+  </dgm:styleLbl>
+  <dgm:styleLbl name="parChTrans2D1">
+    <dgm:scene3d>
+      <a:camera prst="orthographicFront"/>
+      <a:lightRig rig="threePt" dir="t"/>
+    </dgm:scene3d>
+    <dgm:sp3d/>
+    <dgm:txPr/>
+    <dgm:style>
+      <a:lnRef idx="3">
+        <a:scrgbClr r="0" g="0" b="0"/>
+      </a:lnRef>
+      <a:fillRef idx="1">
+        <a:scrgbClr r="0" g="0" b="0"/>
+      </a:fillRef>
+      <a:effectRef idx="1">
+        <a:scrgbClr r="0" g="0" b="0"/>
+      </a:effectRef>
+      <a:fontRef idx="minor">
+        <a:schemeClr val="lt1"/>
+      </a:fontRef>
+    </dgm:style>
+  </dgm:styleLbl>
+  <dgm:styleLbl name="parChTrans2D2">
+    <dgm:scene3d>
+      <a:camera prst="orthographicFront"/>
+      <a:lightRig rig="threePt" dir="t"/>
+    </dgm:scene3d>
+    <dgm:sp3d/>
+    <dgm:txPr/>
+    <dgm:style>
+      <a:lnRef idx="3">
+        <a:scrgbClr r="0" g="0" b="0"/>
+      </a:lnRef>
+      <a:fillRef idx="1">
+        <a:scrgbClr r="0" g="0" b="0"/>
+      </a:fillRef>
+      <a:effectRef idx="1">
+        <a:scrgbClr r="0" g="0" b="0"/>
+      </a:effectRef>
+      <a:fontRef idx="minor">
+        <a:schemeClr val="lt1"/>
+      </a:fontRef>
+    </dgm:style>
+  </dgm:styleLbl>
+  <dgm:styleLbl name="parChTrans2D3">
+    <dgm:scene3d>
+      <a:camera prst="orthographicFront"/>
+      <a:lightRig rig="threePt" dir="t"/>
+    </dgm:scene3d>
+    <dgm:sp3d/>
+    <dgm:txPr/>
+    <dgm:style>
+      <a:lnRef idx="3">
+        <a:scrgbClr r="0" g="0" b="0"/>
+      </a:lnRef>
+      <a:fillRef idx="1">
+        <a:scrgbClr r="0" g="0" b="0"/>
+      </a:fillRef>
+      <a:effectRef idx="1">
+        <a:scrgbClr r="0" g="0" b="0"/>
+      </a:effectRef>
+      <a:fontRef idx="minor">
+        <a:schemeClr val="lt1"/>
+      </a:fontRef>
+    </dgm:style>
+  </dgm:styleLbl>
+  <dgm:styleLbl name="parChTrans2D4">
+    <dgm:scene3d>
+      <a:camera prst="orthographicFront"/>
+      <a:lightRig rig="threePt" dir="t"/>
+    </dgm:scene3d>
+    <dgm:sp3d/>
+    <dgm:txPr/>
+    <dgm:style>
+      <a:lnRef idx="3">
+        <a:scrgbClr r="0" g="0" b="0"/>
+      </a:lnRef>
+      <a:fillRef idx="1">
+        <a:scrgbClr r="0" g="0" b="0"/>
+      </a:fillRef>
+      <a:effectRef idx="1">
+        <a:scrgbClr r="0" g="0" b="0"/>
+      </a:effectRef>
+      <a:fontRef idx="minor">
+        <a:schemeClr val="lt1"/>
+      </a:fontRef>
+    </dgm:style>
+  </dgm:styleLbl>
+  <dgm:styleLbl name="parChTrans1D1">
+    <dgm:scene3d>
+      <a:camera prst="orthographicFront"/>
+      <a:lightRig rig="threePt" dir="t"/>
+    </dgm:scene3d>
+    <dgm:sp3d/>
+    <dgm:txPr/>
+    <dgm:style>
+      <a:lnRef idx="2">
+        <a:scrgbClr r="0" g="0" b="0"/>
+      </a:lnRef>
+      <a:fillRef idx="0">
+        <a:scrgbClr r="0" g="0" b="0"/>
+      </a:fillRef>
+      <a:effectRef idx="0">
+        <a:scrgbClr r="0" g="0" b="0"/>
+      </a:effectRef>
+      <a:fontRef idx="minor"/>
+    </dgm:style>
+  </dgm:styleLbl>
+  <dgm:styleLbl name="parChTrans1D2">
+    <dgm:scene3d>
+      <a:camera prst="orthographicFront"/>
+      <a:lightRig rig="threePt" dir="t"/>
+    </dgm:scene3d>
+    <dgm:sp3d/>
+    <dgm:txPr/>
+    <dgm:style>
+      <a:lnRef idx="2">
+        <a:scrgbClr r="0" g="0" b="0"/>
+      </a:lnRef>
+      <a:fillRef idx="0">
+        <a:scrgbClr r="0" g="0" b="0"/>
+      </a:fillRef>
+      <a:effectRef idx="0">
+        <a:scrgbClr r="0" g="0" b="0"/>
+      </a:effectRef>
+      <a:fontRef idx="minor"/>
+    </dgm:style>
+  </dgm:styleLbl>
+  <dgm:styleLbl name="parChTrans1D3">
+    <dgm:scene3d>
+      <a:camera prst="orthographicFront"/>
+      <a:lightRig rig="threePt" dir="t"/>
+    </dgm:scene3d>
+    <dgm:sp3d/>
+    <dgm:txPr/>
+    <dgm:style>
+      <a:lnRef idx="2">
+        <a:scrgbClr r="0" g="0" b="0"/>
+      </a:lnRef>
+      <a:fillRef idx="0">
+        <a:scrgbClr r="0" g="0" b="0"/>
+      </a:fillRef>
+      <a:effectRef idx="0">
+        <a:scrgbClr r="0" g="0" b="0"/>
+      </a:effectRef>
+      <a:fontRef idx="minor"/>
+    </dgm:style>
+  </dgm:styleLbl>
+  <dgm:styleLbl name="parChTrans1D4">
+    <dgm:scene3d>
+      <a:camera prst="orthographicFront"/>
+      <a:lightRig rig="threePt" dir="t"/>
+    </dgm:scene3d>
+    <dgm:sp3d/>
+    <dgm:txPr/>
+    <dgm:style>
+      <a:lnRef idx="2">
+        <a:scrgbClr r="0" g="0" b="0"/>
+      </a:lnRef>
+      <a:fillRef idx="0">
+        <a:scrgbClr r="0" g="0" b="0"/>
+      </a:fillRef>
+      <a:effectRef idx="0">
+        <a:scrgbClr r="0" g="0" b="0"/>
+      </a:effectRef>
+      <a:fontRef idx="minor"/>
+    </dgm:style>
+  </dgm:styleLbl>
+  <dgm:styleLbl name="fgAcc1">
+    <dgm:scene3d>
+      <a:camera prst="orthographicFront"/>
+      <a:lightRig rig="threePt" dir="t"/>
+    </dgm:scene3d>
+    <dgm:sp3d/>
+    <dgm:txPr/>
+    <dgm:style>
+      <a:lnRef idx="2">
+        <a:scrgbClr r="0" g="0" b="0"/>
+      </a:lnRef>
+      <a:fillRef idx="1">
+        <a:scrgbClr r="0" g="0" b="0"/>
+      </a:fillRef>
+      <a:effectRef idx="0">
+        <a:scrgbClr r="0" g="0" b="0"/>
+      </a:effectRef>
+      <a:fontRef idx="minor"/>
+    </dgm:style>
+  </dgm:styleLbl>
+  <dgm:styleLbl name="conFgAcc1">
+    <dgm:scene3d>
+      <a:camera prst="orthographicFront"/>
+      <a:lightRig rig="threePt" dir="t"/>
+    </dgm:scene3d>
+    <dgm:sp3d/>
+    <dgm:txPr/>
+    <dgm:style>
+      <a:lnRef idx="2">
+        <a:scrgbClr r="0" g="0" b="0"/>
+      </a:lnRef>
+      <a:fillRef idx="1">
+        <a:scrgbClr r="0" g="0" b="0"/>
+      </a:fillRef>
+      <a:effectRef idx="0">
+        <a:scrgbClr r="0" g="0" b="0"/>
+      </a:effectRef>
+      <a:fontRef idx="minor"/>
+    </dgm:style>
+  </dgm:styleLbl>
+  <dgm:styleLbl name="alignAcc1">
+    <dgm:scene3d>
+      <a:camera prst="orthographicFront"/>
+      <a:lightRig rig="threePt" dir="t"/>
+    </dgm:scene3d>
+    <dgm:sp3d/>
+    <dgm:txPr/>
+    <dgm:style>
+      <a:lnRef idx="2">
+        <a:scrgbClr r="0" g="0" b="0"/>
+      </a:lnRef>
+      <a:fillRef idx="1">
+        <a:scrgbClr r="0" g="0" b="0"/>
+      </a:fillRef>
+      <a:effectRef idx="0">
+        <a:scrgbClr r="0" g="0" b="0"/>
+      </a:effectRef>
+      <a:fontRef idx="minor"/>
+    </dgm:style>
+  </dgm:styleLbl>
+  <dgm:styleLbl name="trAlignAcc1">
+    <dgm:scene3d>
+      <a:camera prst="orthographicFront"/>
+      <a:lightRig rig="threePt" dir="t"/>
+    </dgm:scene3d>
+    <dgm:sp3d/>
+    <dgm:txPr/>
+    <dgm:style>
+      <a:lnRef idx="1">
+        <a:scrgbClr r="0" g="0" b="0"/>
+      </a:lnRef>
+      <a:fillRef idx="1">
+        <a:scrgbClr r="0" g="0" b="0"/>
+      </a:fillRef>
+      <a:effectRef idx="0">
+        <a:scrgbClr r="0" g="0" b="0"/>
+      </a:effectRef>
+      <a:fontRef idx="minor"/>
+    </dgm:style>
+  </dgm:styleLbl>
+  <dgm:styleLbl name="bgAcc1">
+    <dgm:scene3d>
+      <a:camera prst="orthographicFront"/>
+      <a:lightRig rig="threePt" dir="t"/>
+    </dgm:scene3d>
+    <dgm:sp3d/>
+    <dgm:txPr/>
+    <dgm:style>
+      <a:lnRef idx="2">
+        <a:scrgbClr r="0" g="0" b="0"/>
+      </a:lnRef>
+      <a:fillRef idx="1">
+        <a:scrgbClr r="0" g="0" b="0"/>
+      </a:fillRef>
+      <a:effectRef idx="0">
+        <a:scrgbClr r="0" g="0" b="0"/>
+      </a:effectRef>
+      <a:fontRef idx="minor"/>
+    </dgm:style>
+  </dgm:styleLbl>
+  <dgm:styleLbl name="solidFgAcc1">
+    <dgm:scene3d>
+      <a:camera prst="orthographicFront"/>
+      <a:lightRig rig="threePt" dir="t"/>
+    </dgm:scene3d>
+    <dgm:sp3d/>
+    <dgm:txPr/>
+    <dgm:style>
+      <a:lnRef idx="2">
+        <a:scrgbClr r="0" g="0" b="0"/>
+      </a:lnRef>
+      <a:fillRef idx="1">
+        <a:scrgbClr r="0" g="0" b="0"/>
+      </a:fillRef>
+      <a:effectRef idx="0">
+        <a:scrgbClr r="0" g="0" b="0"/>
+      </a:effectRef>
+      <a:fontRef idx="minor"/>
+    </dgm:style>
+  </dgm:styleLbl>
+  <dgm:styleLbl name="solidAlignAcc1">
+    <dgm:scene3d>
+      <a:camera prst="orthographicFront"/>
+      <a:lightRig rig="threePt" dir="t"/>
+    </dgm:scene3d>
+    <dgm:sp3d/>
+    <dgm:txPr/>
+    <dgm:style>
+      <a:lnRef idx="2">
+        <a:scrgbClr r="0" g="0" b="0"/>
+      </a:lnRef>
+      <a:fillRef idx="1">
+        <a:scrgbClr r="0" g="0" b="0"/>
+      </a:fillRef>
+      <a:effectRef idx="0">
+        <a:scrgbClr r="0" g="0" b="0"/>
+      </a:effectRef>
+      <a:fontRef idx="minor"/>
+    </dgm:style>
+  </dgm:styleLbl>
+  <dgm:styleLbl name="solidBgAcc1">
+    <dgm:scene3d>
+      <a:camera prst="orthographicFront"/>
+      <a:lightRig rig="threePt" dir="t"/>
+    </dgm:scene3d>
+    <dgm:sp3d/>
+    <dgm:txPr/>
+    <dgm:style>
+      <a:lnRef idx="2">
+        <a:scrgbClr r="0" g="0" b="0"/>
+      </a:lnRef>
+      <a:fillRef idx="1">
+        <a:scrgbClr r="0" g="0" b="0"/>
+      </a:fillRef>
+      <a:effectRef idx="0">
+        <a:scrgbClr r="0" g="0" b="0"/>
+      </a:effectRef>
+      <a:fontRef idx="minor"/>
+    </dgm:style>
+  </dgm:styleLbl>
+  <dgm:styleLbl name="fgAccFollowNode1">
+    <dgm:scene3d>
+      <a:camera prst="orthographicFront"/>
+      <a:lightRig rig="threePt" dir="t"/>
+    </dgm:scene3d>
+    <dgm:sp3d/>
+    <dgm:txPr/>
+    <dgm:style>
+      <a:lnRef idx="2">
+        <a:scrgbClr r="0" g="0" b="0"/>
+      </a:lnRef>
+      <a:fillRef idx="1">
+        <a:scrgbClr r="0" g="0" b="0"/>
+      </a:fillRef>
+      <a:effectRef idx="0">
+        <a:scrgbClr r="0" g="0" b="0"/>
+      </a:effectRef>
+      <a:fontRef idx="minor"/>
+    </dgm:style>
+  </dgm:styleLbl>
+  <dgm:styleLbl name="alignAccFollowNode1">
+    <dgm:scene3d>
+      <a:camera prst="orthographicFront"/>
+      <a:lightRig rig="threePt" dir="t"/>
+    </dgm:scene3d>
+    <dgm:sp3d/>
+    <dgm:txPr/>
+    <dgm:style>
+      <a:lnRef idx="2">
+        <a:scrgbClr r="0" g="0" b="0"/>
+      </a:lnRef>
+      <a:fillRef idx="1">
+        <a:scrgbClr r="0" g="0" b="0"/>
+      </a:fillRef>
+      <a:effectRef idx="0">
+        <a:scrgbClr r="0" g="0" b="0"/>
+      </a:effectRef>
+      <a:fontRef idx="minor"/>
+    </dgm:style>
+  </dgm:styleLbl>
+  <dgm:styleLbl name="bgAccFollowNode1">
+    <dgm:scene3d>
+      <a:camera prst="orthographicFront"/>
+      <a:lightRig rig="threePt" dir="t"/>
+    </dgm:scene3d>
+    <dgm:sp3d/>
+    <dgm:txPr/>
+    <dgm:style>
+      <a:lnRef idx="2">
+        <a:scrgbClr r="0" g="0" b="0"/>
+      </a:lnRef>
+      <a:fillRef idx="1">
+        <a:scrgbClr r="0" g="0" b="0"/>
+      </a:fillRef>
+      <a:effectRef idx="0">
+        <a:scrgbClr r="0" g="0" b="0"/>
+      </a:effectRef>
+      <a:fontRef idx="minor"/>
+    </dgm:style>
+  </dgm:styleLbl>
+  <dgm:styleLbl name="fgAcc0">
+    <dgm:scene3d>
+      <a:camera prst="orthographicFront"/>
+      <a:lightRig rig="threePt" dir="t"/>
+    </dgm:scene3d>
+    <dgm:sp3d/>
+    <dgm:txPr/>
+    <dgm:style>
+      <a:lnRef idx="2">
+        <a:scrgbClr r="0" g="0" b="0"/>
+      </a:lnRef>
+      <a:fillRef idx="1">
+        <a:scrgbClr r="0" g="0" b="0"/>
+      </a:fillRef>
+      <a:effectRef idx="0">
+        <a:scrgbClr r="0" g="0" b="0"/>
+      </a:effectRef>
+      <a:fontRef idx="minor"/>
+    </dgm:style>
+  </dgm:styleLbl>
+  <dgm:styleLbl name="fgAcc2">
+    <dgm:scene3d>
+      <a:camera prst="orthographicFront"/>
+      <a:lightRig rig="threePt" dir="t"/>
+    </dgm:scene3d>
+    <dgm:sp3d/>
+    <dgm:txPr/>
+    <dgm:style>
+      <a:lnRef idx="2">
+        <a:scrgbClr r="0" g="0" b="0"/>
+      </a:lnRef>
+      <a:fillRef idx="1">
+        <a:scrgbClr r="0" g="0" b="0"/>
+      </a:fillRef>
+      <a:effectRef idx="0">
+        <a:scrgbClr r="0" g="0" b="0"/>
+      </a:effectRef>
+      <a:fontRef idx="minor"/>
+    </dgm:style>
+  </dgm:styleLbl>
+  <dgm:styleLbl name="fgAcc3">
+    <dgm:scene3d>
+      <a:camera prst="orthographicFront"/>
+      <a:lightRig rig="threePt" dir="t"/>
+    </dgm:scene3d>
+    <dgm:sp3d/>
+    <dgm:txPr/>
+    <dgm:style>
+      <a:lnRef idx="2">
+        <a:scrgbClr r="0" g="0" b="0"/>
+      </a:lnRef>
+      <a:fillRef idx="1">
+        <a:scrgbClr r="0" g="0" b="0"/>
+      </a:fillRef>
+      <a:effectRef idx="0">
+        <a:scrgbClr r="0" g="0" b="0"/>
+      </a:effectRef>
+      <a:fontRef idx="minor"/>
+    </dgm:style>
+  </dgm:styleLbl>
+  <dgm:styleLbl name="fgAcc4">
+    <dgm:scene3d>
+      <a:camera prst="orthographicFront"/>
+      <a:lightRig rig="threePt" dir="t"/>
+    </dgm:scene3d>
+    <dgm:sp3d/>
+    <dgm:txPr/>
+    <dgm:style>
+      <a:lnRef idx="2">
+        <a:scrgbClr r="0" g="0" b="0"/>
+      </a:lnRef>
+      <a:fillRef idx="1">
+        <a:scrgbClr r="0" g="0" b="0"/>
+      </a:fillRef>
+      <a:effectRef idx="0">
+        <a:scrgbClr r="0" g="0" b="0"/>
+      </a:effectRef>
+      <a:fontRef idx="minor"/>
+    </dgm:style>
+  </dgm:styleLbl>
+  <dgm:styleLbl name="bgShp">
+    <dgm:scene3d>
+      <a:camera prst="orthographicFront"/>
+      <a:lightRig rig="threePt" dir="t"/>
+    </dgm:scene3d>
+    <dgm:sp3d/>
+    <dgm:txPr/>
+    <dgm:style>
+      <a:lnRef idx="0">
+        <a:scrgbClr r="0" g="0" b="0"/>
+      </a:lnRef>
+      <a:fillRef idx="1">
+        <a:scrgbClr r="0" g="0" b="0"/>
+      </a:fillRef>
+      <a:effectRef idx="0">
+        <a:scrgbClr r="0" g="0" b="0"/>
+      </a:effectRef>
+      <a:fontRef idx="minor"/>
+    </dgm:style>
+  </dgm:styleLbl>
+  <dgm:styleLbl name="dkBgShp">
+    <dgm:scene3d>
+      <a:camera prst="orthographicFront"/>
+      <a:lightRig rig="threePt" dir="t"/>
+    </dgm:scene3d>
+    <dgm:sp3d/>
+    <dgm:txPr/>
+    <dgm:style>
+      <a:lnRef idx="0">
+        <a:scrgbClr r="0" g="0" b="0"/>
+      </a:lnRef>
+      <a:fillRef idx="1">
+        <a:scrgbClr r="0" g="0" b="0"/>
+      </a:fillRef>
+      <a:effectRef idx="0">
+        <a:scrgbClr r="0" g="0" b="0"/>
+      </a:effectRef>
+      <a:fontRef idx="minor"/>
+    </dgm:style>
+  </dgm:styleLbl>
+  <dgm:styleLbl name="trBgShp">
+    <dgm:scene3d>
+      <a:camera prst="orthographicFront"/>
+      <a:lightRig rig="threePt" dir="t"/>
+    </dgm:scene3d>
+    <dgm:sp3d/>
+    <dgm:txPr/>
+    <dgm:style>
+      <a:lnRef idx="0">
+        <a:scrgbClr r="0" g="0" b="0"/>
+      </a:lnRef>
+      <a:fillRef idx="1">
+        <a:scrgbClr r="0" g="0" b="0"/>
+      </a:fillRef>
+      <a:effectRef idx="0">
+        <a:scrgbClr r="0" g="0" b="0"/>
+      </a:effectRef>
+      <a:fontRef idx="minor"/>
+    </dgm:style>
+  </dgm:styleLbl>
+  <dgm:styleLbl name="fgShp">
+    <dgm:scene3d>
+      <a:camera prst="orthographicFront"/>
+      <a:lightRig rig="threePt" dir="t"/>
+    </dgm:scene3d>
+    <dgm:sp3d/>
+    <dgm:txPr/>
+    <dgm:style>
+      <a:lnRef idx="3">
+        <a:scrgbClr r="0" g="0" b="0"/>
+      </a:lnRef>
+      <a:fillRef idx="1">
+        <a:scrgbClr r="0" g="0" b="0"/>
+      </a:fillRef>
+      <a:effectRef idx="1">
+        <a:scrgbClr r="0" g="0" b="0"/>
+      </a:effectRef>
+      <a:fontRef idx="minor"/>
+    </dgm:style>
+  </dgm:styleLbl>
+  <dgm:styleLbl name="revTx">
+    <dgm:scene3d>
+      <a:camera prst="orthographicFront"/>
+      <a:lightRig rig="threePt" dir="t"/>
+    </dgm:scene3d>
+    <dgm:sp3d/>
+    <dgm:txPr/>
+    <dgm:style>
+      <a:lnRef idx="0">
+        <a:scrgbClr r="0" g="0" b="0"/>
+      </a:lnRef>
+      <a:fillRef idx="0">
+        <a:scrgbClr r="0" g="0" b="0"/>
+      </a:fillRef>
+      <a:effectRef idx="0">
+        <a:scrgbClr r="0" g="0" b="0"/>
+      </a:effectRef>
+      <a:fontRef idx="minor"/>
+    </dgm:style>
+  </dgm:styleLbl>
+</dgm:styleDef>
+</file>
+
 <file path=ppt/handoutMasters/handoutMaster1.xml><?xml version="1.0" encoding="utf-8"?>
 <p:handoutMaster xmlns:a="http://schemas.openxmlformats.org/drawingml/2006/main" xmlns:r="http://schemas.openxmlformats.org/officeDocument/2006/relationships" xmlns:p="http://schemas.openxmlformats.org/presentationml/2006/main">
   <p:cSld>
@@ -2851,7 +5474,7 @@
           <a:p>
             <a:fld id="{1CA5457B-CDAE-4DEB-AEC8-C82DE2312E37}" type="datetimeFigureOut">
               <a:rPr lang="en-US" smtClean="0"/>
-              <a:t>4/10/2026</a:t>
+              <a:t>4/14/2026</a:t>
             </a:fld>
             <a:endParaRPr lang="en-US" dirty="0"/>
           </a:p>
@@ -3028,7 +5651,7 @@
           <a:p>
             <a:fld id="{090B78EA-28CE-41D8-9043-90E391E5F567}" type="datetimeFigureOut">
               <a:rPr lang="en-US" noProof="0" smtClean="0"/>
-              <a:t>4/10/2026</a:t>
+              <a:t>4/14/2026</a:t>
             </a:fld>
             <a:endParaRPr lang="en-US" noProof="0" dirty="0"/>
           </a:p>
@@ -28126,6 +30749,1130 @@
 </p:sld>
 </file>
 
+<file path=ppt/slides/slide10.xml><?xml version="1.0" encoding="utf-8"?>
+<p:sld xmlns:a="http://schemas.openxmlformats.org/drawingml/2006/main" xmlns:r="http://schemas.openxmlformats.org/officeDocument/2006/relationships" xmlns:p="http://schemas.openxmlformats.org/presentationml/2006/main">
+  <p:cSld>
+    <p:spTree>
+      <p:nvGrpSpPr>
+        <p:cNvPr id="1" name="">
+          <a:extLst>
+            <a:ext uri="{FF2B5EF4-FFF2-40B4-BE49-F238E27FC236}">
+              <a16:creationId xmlns:a16="http://schemas.microsoft.com/office/drawing/2014/main" id="{CDC11F20-E954-5E0F-0A52-DEEB149DF8B5}"/>
+            </a:ext>
+          </a:extLst>
+        </p:cNvPr>
+        <p:cNvGrpSpPr/>
+        <p:nvPr/>
+      </p:nvGrpSpPr>
+      <p:grpSpPr>
+        <a:xfrm>
+          <a:off x="0" y="0"/>
+          <a:ext cx="0" cy="0"/>
+          <a:chOff x="0" y="0"/>
+          <a:chExt cx="0" cy="0"/>
+        </a:xfrm>
+      </p:grpSpPr>
+      <p:sp>
+        <p:nvSpPr>
+          <p:cNvPr id="7" name="Title 6">
+            <a:extLst>
+              <a:ext uri="{FF2B5EF4-FFF2-40B4-BE49-F238E27FC236}">
+                <a16:creationId xmlns:a16="http://schemas.microsoft.com/office/drawing/2014/main" id="{A605722F-6EB1-EA30-9871-62A7CD674639}"/>
+              </a:ext>
+            </a:extLst>
+          </p:cNvPr>
+          <p:cNvSpPr>
+            <a:spLocks noGrp="1"/>
+          </p:cNvSpPr>
+          <p:nvPr>
+            <p:ph type="title"/>
+          </p:nvPr>
+        </p:nvSpPr>
+        <p:spPr>
+          <a:xfrm>
+            <a:off x="444500" y="542925"/>
+            <a:ext cx="11214100" cy="535531"/>
+          </a:xfrm>
+        </p:spPr>
+        <p:txBody>
+          <a:bodyPr wrap="square" anchor="t">
+            <a:normAutofit/>
+          </a:bodyPr>
+          <a:lstStyle/>
+          <a:p>
+            <a:r>
+              <a:rPr lang="en-IN" dirty="0"/>
+              <a:t>Creation of the first project</a:t>
+            </a:r>
+            <a:endParaRPr lang="en-US" dirty="0"/>
+          </a:p>
+        </p:txBody>
+      </p:sp>
+      <p:sp>
+        <p:nvSpPr>
+          <p:cNvPr id="2" name="Slide Number Placeholder 1">
+            <a:extLst>
+              <a:ext uri="{FF2B5EF4-FFF2-40B4-BE49-F238E27FC236}">
+                <a16:creationId xmlns:a16="http://schemas.microsoft.com/office/drawing/2014/main" id="{086FB888-4B36-38D8-229A-2F13D8CE4A01}"/>
+              </a:ext>
+            </a:extLst>
+          </p:cNvPr>
+          <p:cNvSpPr>
+            <a:spLocks noGrp="1"/>
+          </p:cNvSpPr>
+          <p:nvPr>
+            <p:ph type="sldNum" sz="quarter" idx="12"/>
+          </p:nvPr>
+        </p:nvSpPr>
+        <p:spPr>
+          <a:xfrm>
+            <a:off x="11252200" y="6315075"/>
+            <a:ext cx="406400" cy="365125"/>
+          </a:xfrm>
+        </p:spPr>
+        <p:txBody>
+          <a:bodyPr anchor="ctr">
+            <a:normAutofit/>
+          </a:bodyPr>
+          <a:lstStyle/>
+          <a:p>
+            <a:pPr>
+              <a:spcAft>
+                <a:spcPts val="600"/>
+              </a:spcAft>
+            </a:pPr>
+            <a:fld id="{C263D6C4-4840-40CC-AC84-17E24B3B7BDE}" type="slidenum">
+              <a:rPr lang="en-US" smtClean="0"/>
+              <a:pPr>
+                <a:spcAft>
+                  <a:spcPts val="600"/>
+                </a:spcAft>
+              </a:pPr>
+              <a:t>10</a:t>
+            </a:fld>
+            <a:endParaRPr lang="en-US"/>
+          </a:p>
+        </p:txBody>
+      </p:sp>
+      <p:graphicFrame>
+        <p:nvGraphicFramePr>
+          <p:cNvPr id="12" name="Text Placeholder 9">
+            <a:extLst>
+              <a:ext uri="{FF2B5EF4-FFF2-40B4-BE49-F238E27FC236}">
+                <a16:creationId xmlns:a16="http://schemas.microsoft.com/office/drawing/2014/main" id="{EB760C11-49C2-8A87-40EA-A3B12900487D}"/>
+              </a:ext>
+            </a:extLst>
+          </p:cNvPr>
+          <p:cNvGraphicFramePr>
+            <a:graphicFrameLocks noGrp="1"/>
+          </p:cNvGraphicFramePr>
+          <p:nvPr>
+            <p:ph idx="1"/>
+            <p:extLst>
+              <p:ext uri="{D42A27DB-BD31-4B8C-83A1-F6EECF244321}">
+                <p14:modId xmlns:p14="http://schemas.microsoft.com/office/powerpoint/2010/main" val="2669722087"/>
+              </p:ext>
+            </p:extLst>
+          </p:nvPr>
+        </p:nvGraphicFramePr>
+        <p:xfrm>
+          <a:off x="443365" y="1825625"/>
+          <a:ext cx="11215235" cy="4351338"/>
+        </p:xfrm>
+        <a:graphic>
+          <a:graphicData uri="http://schemas.openxmlformats.org/drawingml/2006/diagram">
+            <dgm:relIds xmlns:dgm="http://schemas.openxmlformats.org/drawingml/2006/diagram" xmlns:r="http://schemas.openxmlformats.org/officeDocument/2006/relationships" r:dm="rId2" r:lo="rId3" r:qs="rId4" r:cs="rId5"/>
+          </a:graphicData>
+        </a:graphic>
+      </p:graphicFrame>
+    </p:spTree>
+    <p:extLst>
+      <p:ext uri="{BB962C8B-B14F-4D97-AF65-F5344CB8AC3E}">
+        <p14:creationId xmlns:p14="http://schemas.microsoft.com/office/powerpoint/2010/main" val="927929327"/>
+      </p:ext>
+    </p:extLst>
+  </p:cSld>
+  <p:clrMapOvr>
+    <a:masterClrMapping/>
+  </p:clrMapOvr>
+  <mc:AlternateContent xmlns:mc="http://schemas.openxmlformats.org/markup-compatibility/2006" xmlns:p14="http://schemas.microsoft.com/office/powerpoint/2010/main">
+    <mc:Choice Requires="p14">
+      <p:transition spd="med" p14:dur="700">
+        <p:fade/>
+      </p:transition>
+    </mc:Choice>
+    <mc:Fallback xmlns="">
+      <p:transition spd="med">
+        <p:fade/>
+      </p:transition>
+    </mc:Fallback>
+  </mc:AlternateContent>
+</p:sld>
+</file>
+
+<file path=ppt/slides/slide11.xml><?xml version="1.0" encoding="utf-8"?>
+<p:sld xmlns:a="http://schemas.openxmlformats.org/drawingml/2006/main" xmlns:r="http://schemas.openxmlformats.org/officeDocument/2006/relationships" xmlns:p="http://schemas.openxmlformats.org/presentationml/2006/main">
+  <p:cSld>
+    <p:spTree>
+      <p:nvGrpSpPr>
+        <p:cNvPr id="1" name=""/>
+        <p:cNvGrpSpPr/>
+        <p:nvPr/>
+      </p:nvGrpSpPr>
+      <p:grpSpPr>
+        <a:xfrm>
+          <a:off x="0" y="0"/>
+          <a:ext cx="0" cy="0"/>
+          <a:chOff x="0" y="0"/>
+          <a:chExt cx="0" cy="0"/>
+        </a:xfrm>
+      </p:grpSpPr>
+      <p:sp>
+        <p:nvSpPr>
+          <p:cNvPr id="2" name="Title 1">
+            <a:extLst>
+              <a:ext uri="{FF2B5EF4-FFF2-40B4-BE49-F238E27FC236}">
+                <a16:creationId xmlns:a16="http://schemas.microsoft.com/office/drawing/2014/main" id="{F95956CE-AF27-9DED-981D-2EA40D114F80}"/>
+              </a:ext>
+            </a:extLst>
+          </p:cNvPr>
+          <p:cNvSpPr>
+            <a:spLocks noGrp="1"/>
+          </p:cNvSpPr>
+          <p:nvPr>
+            <p:ph type="title"/>
+          </p:nvPr>
+        </p:nvSpPr>
+        <p:spPr/>
+        <p:txBody>
+          <a:bodyPr/>
+          <a:lstStyle/>
+          <a:p>
+            <a:r>
+              <a:rPr lang="en-IN" dirty="0"/>
+              <a:t>CDS Umbrella</a:t>
+            </a:r>
+          </a:p>
+        </p:txBody>
+      </p:sp>
+      <p:sp>
+        <p:nvSpPr>
+          <p:cNvPr id="3" name="Slide Number Placeholder 2">
+            <a:extLst>
+              <a:ext uri="{FF2B5EF4-FFF2-40B4-BE49-F238E27FC236}">
+                <a16:creationId xmlns:a16="http://schemas.microsoft.com/office/drawing/2014/main" id="{089EAA71-C2EA-0E46-171F-08C3F76F1D74}"/>
+              </a:ext>
+            </a:extLst>
+          </p:cNvPr>
+          <p:cNvSpPr>
+            <a:spLocks noGrp="1"/>
+          </p:cNvSpPr>
+          <p:nvPr>
+            <p:ph type="sldNum" sz="quarter" idx="12"/>
+          </p:nvPr>
+        </p:nvSpPr>
+        <p:spPr/>
+        <p:txBody>
+          <a:bodyPr/>
+          <a:lstStyle/>
+          <a:p>
+            <a:fld id="{C263D6C4-4840-40CC-AC84-17E24B3B7BDE}" type="slidenum">
+              <a:rPr lang="en-US" noProof="0" smtClean="0"/>
+              <a:pPr/>
+              <a:t>11</a:t>
+            </a:fld>
+            <a:endParaRPr lang="en-US" noProof="0" dirty="0"/>
+          </a:p>
+        </p:txBody>
+      </p:sp>
+      <p:pic>
+        <p:nvPicPr>
+          <p:cNvPr id="5" name="Content Placeholder 4">
+            <a:extLst>
+              <a:ext uri="{FF2B5EF4-FFF2-40B4-BE49-F238E27FC236}">
+                <a16:creationId xmlns:a16="http://schemas.microsoft.com/office/drawing/2014/main" id="{2A2B6227-B82C-A1B7-640E-8078DB614D6B}"/>
+              </a:ext>
+            </a:extLst>
+          </p:cNvPr>
+          <p:cNvPicPr>
+            <a:picLocks noGrp="1" noChangeAspect="1"/>
+          </p:cNvPicPr>
+          <p:nvPr>
+            <p:ph idx="1"/>
+          </p:nvPr>
+        </p:nvPicPr>
+        <p:blipFill>
+          <a:blip r:embed="rId2"/>
+          <a:stretch>
+            <a:fillRect/>
+          </a:stretch>
+        </p:blipFill>
+        <p:spPr>
+          <a:xfrm>
+            <a:off x="444500" y="1660891"/>
+            <a:ext cx="4908755" cy="4271825"/>
+          </a:xfrm>
+          <a:prstGeom prst="rect">
+            <a:avLst/>
+          </a:prstGeom>
+        </p:spPr>
+      </p:pic>
+      <p:sp>
+        <p:nvSpPr>
+          <p:cNvPr id="6" name="TextBox 5">
+            <a:extLst>
+              <a:ext uri="{FF2B5EF4-FFF2-40B4-BE49-F238E27FC236}">
+                <a16:creationId xmlns:a16="http://schemas.microsoft.com/office/drawing/2014/main" id="{5BEF1F3E-BA80-A26C-CAE7-5FA56D607B6F}"/>
+              </a:ext>
+            </a:extLst>
+          </p:cNvPr>
+          <p:cNvSpPr txBox="1"/>
+          <p:nvPr/>
+        </p:nvSpPr>
+        <p:spPr>
+          <a:xfrm>
+            <a:off x="5914103" y="1660891"/>
+            <a:ext cx="5833397" cy="3693319"/>
+          </a:xfrm>
+          <a:prstGeom prst="rect">
+            <a:avLst/>
+          </a:prstGeom>
+          <a:noFill/>
+        </p:spPr>
+        <p:txBody>
+          <a:bodyPr wrap="square" rtlCol="0">
+            <a:spAutoFit/>
+          </a:bodyPr>
+          <a:lstStyle/>
+          <a:p>
+            <a:r>
+              <a:rPr lang="en-IN" dirty="0">
+                <a:solidFill>
+                  <a:schemeClr val="bg1"/>
+                </a:solidFill>
+              </a:rPr>
+              <a:t>CDS (umbrella concept)</a:t>
+            </a:r>
+          </a:p>
+          <a:p>
+            <a:r>
+              <a:rPr lang="en-IN" dirty="0">
+                <a:solidFill>
+                  <a:schemeClr val="bg1"/>
+                </a:solidFill>
+              </a:rPr>
+              <a:t>│</a:t>
+            </a:r>
+          </a:p>
+          <a:p>
+            <a:r>
+              <a:rPr lang="en-IN" dirty="0">
+                <a:solidFill>
+                  <a:schemeClr val="bg1"/>
+                </a:solidFill>
+              </a:rPr>
+              <a:t>├── CDL  → model definition language (.</a:t>
+            </a:r>
+            <a:r>
+              <a:rPr lang="en-IN" dirty="0" err="1">
+                <a:solidFill>
+                  <a:schemeClr val="bg1"/>
+                </a:solidFill>
+              </a:rPr>
+              <a:t>cds</a:t>
+            </a:r>
+            <a:r>
+              <a:rPr lang="en-IN" dirty="0">
+                <a:solidFill>
+                  <a:schemeClr val="bg1"/>
+                </a:solidFill>
+              </a:rPr>
+              <a:t> files)</a:t>
+            </a:r>
+          </a:p>
+          <a:p>
+            <a:r>
+              <a:rPr lang="en-IN" dirty="0">
+                <a:solidFill>
+                  <a:schemeClr val="bg1"/>
+                </a:solidFill>
+              </a:rPr>
+              <a:t>│        → entities, services, annotations</a:t>
+            </a:r>
+          </a:p>
+          <a:p>
+            <a:r>
+              <a:rPr lang="en-IN" dirty="0">
+                <a:solidFill>
+                  <a:schemeClr val="bg1"/>
+                </a:solidFill>
+              </a:rPr>
+              <a:t>│</a:t>
+            </a:r>
+          </a:p>
+          <a:p>
+            <a:r>
+              <a:rPr lang="en-IN" dirty="0">
+                <a:solidFill>
+                  <a:schemeClr val="bg1"/>
+                </a:solidFill>
+              </a:rPr>
+              <a:t>├── CSN  → compiled JSON model</a:t>
+            </a:r>
+          </a:p>
+          <a:p>
+            <a:r>
+              <a:rPr lang="en-IN" dirty="0">
+                <a:solidFill>
+                  <a:schemeClr val="bg1"/>
+                </a:solidFill>
+              </a:rPr>
+              <a:t>│        → machine readable</a:t>
+            </a:r>
+          </a:p>
+          <a:p>
+            <a:r>
+              <a:rPr lang="en-IN" dirty="0">
+                <a:solidFill>
+                  <a:schemeClr val="bg1"/>
+                </a:solidFill>
+              </a:rPr>
+              <a:t>│</a:t>
+            </a:r>
+          </a:p>
+          <a:p>
+            <a:r>
+              <a:rPr lang="en-IN" dirty="0">
+                <a:solidFill>
+                  <a:schemeClr val="bg1"/>
+                </a:solidFill>
+              </a:rPr>
+              <a:t>├── CQL  → query language</a:t>
+            </a:r>
+          </a:p>
+          <a:p>
+            <a:r>
+              <a:rPr lang="en-IN" dirty="0">
+                <a:solidFill>
+                  <a:schemeClr val="bg1"/>
+                </a:solidFill>
+              </a:rPr>
+              <a:t>│        → SQL-like query syntax</a:t>
+            </a:r>
+          </a:p>
+          <a:p>
+            <a:r>
+              <a:rPr lang="en-IN" dirty="0">
+                <a:solidFill>
+                  <a:schemeClr val="bg1"/>
+                </a:solidFill>
+              </a:rPr>
+              <a:t>│</a:t>
+            </a:r>
+          </a:p>
+          <a:p>
+            <a:r>
+              <a:rPr lang="en-IN" dirty="0">
+                <a:solidFill>
+                  <a:schemeClr val="bg1"/>
+                </a:solidFill>
+              </a:rPr>
+              <a:t>└── </a:t>
+            </a:r>
+            <a:r>
+              <a:rPr lang="en-IN" dirty="0" err="1">
+                <a:solidFill>
+                  <a:schemeClr val="bg1"/>
+                </a:solidFill>
+              </a:rPr>
+              <a:t>cds.ql</a:t>
+            </a:r>
+            <a:r>
+              <a:rPr lang="en-IN" dirty="0">
+                <a:solidFill>
+                  <a:schemeClr val="bg1"/>
+                </a:solidFill>
+              </a:rPr>
+              <a:t> → JavaScript query builder API</a:t>
+            </a:r>
+          </a:p>
+          <a:p>
+            <a:r>
+              <a:rPr lang="en-IN" dirty="0">
+                <a:solidFill>
+                  <a:schemeClr val="bg1"/>
+                </a:solidFill>
+              </a:rPr>
+              <a:t>          → creates CQN internally</a:t>
+            </a:r>
+          </a:p>
+        </p:txBody>
+      </p:sp>
+    </p:spTree>
+    <p:extLst>
+      <p:ext uri="{BB962C8B-B14F-4D97-AF65-F5344CB8AC3E}">
+        <p14:creationId xmlns:p14="http://schemas.microsoft.com/office/powerpoint/2010/main" val="3751667413"/>
+      </p:ext>
+    </p:extLst>
+  </p:cSld>
+  <p:clrMapOvr>
+    <a:masterClrMapping/>
+  </p:clrMapOvr>
+</p:sld>
+</file>
+
+<file path=ppt/slides/slide12.xml><?xml version="1.0" encoding="utf-8"?>
+<p:sld xmlns:a="http://schemas.openxmlformats.org/drawingml/2006/main" xmlns:r="http://schemas.openxmlformats.org/officeDocument/2006/relationships" xmlns:p="http://schemas.openxmlformats.org/presentationml/2006/main">
+  <p:cSld>
+    <p:spTree>
+      <p:nvGrpSpPr>
+        <p:cNvPr id="1" name="">
+          <a:extLst>
+            <a:ext uri="{FF2B5EF4-FFF2-40B4-BE49-F238E27FC236}">
+              <a16:creationId xmlns:a16="http://schemas.microsoft.com/office/drawing/2014/main" id="{1BF9234D-39A4-BC40-2C77-AA1ACBF5CA9D}"/>
+            </a:ext>
+          </a:extLst>
+        </p:cNvPr>
+        <p:cNvGrpSpPr/>
+        <p:nvPr/>
+      </p:nvGrpSpPr>
+      <p:grpSpPr>
+        <a:xfrm>
+          <a:off x="0" y="0"/>
+          <a:ext cx="0" cy="0"/>
+          <a:chOff x="0" y="0"/>
+          <a:chExt cx="0" cy="0"/>
+        </a:xfrm>
+      </p:grpSpPr>
+      <p:sp>
+        <p:nvSpPr>
+          <p:cNvPr id="2" name="Slide Number Placeholder 1">
+            <a:extLst>
+              <a:ext uri="{FF2B5EF4-FFF2-40B4-BE49-F238E27FC236}">
+                <a16:creationId xmlns:a16="http://schemas.microsoft.com/office/drawing/2014/main" id="{7AC29756-E90F-9685-C8B0-BDBDE0BFFD0B}"/>
+              </a:ext>
+            </a:extLst>
+          </p:cNvPr>
+          <p:cNvSpPr>
+            <a:spLocks noGrp="1"/>
+          </p:cNvSpPr>
+          <p:nvPr>
+            <p:ph type="sldNum" sz="quarter" idx="12"/>
+          </p:nvPr>
+        </p:nvSpPr>
+        <p:spPr>
+          <a:xfrm>
+            <a:off x="11252200" y="6315075"/>
+            <a:ext cx="406400" cy="365125"/>
+          </a:xfrm>
+        </p:spPr>
+        <p:txBody>
+          <a:bodyPr anchor="ctr">
+            <a:normAutofit/>
+          </a:bodyPr>
+          <a:lstStyle/>
+          <a:p>
+            <a:pPr>
+              <a:spcAft>
+                <a:spcPts val="600"/>
+              </a:spcAft>
+            </a:pPr>
+            <a:fld id="{C263D6C4-4840-40CC-AC84-17E24B3B7BDE}" type="slidenum">
+              <a:rPr lang="en-US" smtClean="0"/>
+              <a:pPr>
+                <a:spcAft>
+                  <a:spcPts val="600"/>
+                </a:spcAft>
+              </a:pPr>
+              <a:t>12</a:t>
+            </a:fld>
+            <a:endParaRPr lang="en-US"/>
+          </a:p>
+        </p:txBody>
+      </p:sp>
+      <p:sp>
+        <p:nvSpPr>
+          <p:cNvPr id="5" name="Content Placeholder 4">
+            <a:extLst>
+              <a:ext uri="{FF2B5EF4-FFF2-40B4-BE49-F238E27FC236}">
+                <a16:creationId xmlns:a16="http://schemas.microsoft.com/office/drawing/2014/main" id="{6C4D57D2-72B9-FDAD-F891-A805C869EEFB}"/>
+              </a:ext>
+            </a:extLst>
+          </p:cNvPr>
+          <p:cNvSpPr>
+            <a:spLocks noGrp="1"/>
+          </p:cNvSpPr>
+          <p:nvPr>
+            <p:ph idx="1"/>
+          </p:nvPr>
+        </p:nvSpPr>
+        <p:spPr>
+          <a:xfrm>
+            <a:off x="443365" y="2684607"/>
+            <a:ext cx="11215235" cy="4351338"/>
+          </a:xfrm>
+        </p:spPr>
+        <p:txBody>
+          <a:bodyPr>
+            <a:normAutofit/>
+          </a:bodyPr>
+          <a:lstStyle/>
+          <a:p>
+            <a:pPr marL="0" indent="0" algn="ctr">
+              <a:buNone/>
+            </a:pPr>
+            <a:r>
+              <a:rPr lang="en-IN" sz="6600" dirty="0"/>
+              <a:t>Domain Models</a:t>
+            </a:r>
+          </a:p>
+        </p:txBody>
+      </p:sp>
+    </p:spTree>
+    <p:extLst>
+      <p:ext uri="{BB962C8B-B14F-4D97-AF65-F5344CB8AC3E}">
+        <p14:creationId xmlns:p14="http://schemas.microsoft.com/office/powerpoint/2010/main" val="695751394"/>
+      </p:ext>
+    </p:extLst>
+  </p:cSld>
+  <p:clrMapOvr>
+    <a:masterClrMapping/>
+  </p:clrMapOvr>
+  <mc:AlternateContent xmlns:mc="http://schemas.openxmlformats.org/markup-compatibility/2006" xmlns:p14="http://schemas.microsoft.com/office/powerpoint/2010/main">
+    <mc:Choice Requires="p14">
+      <p:transition spd="med" p14:dur="700">
+        <p:fade/>
+      </p:transition>
+    </mc:Choice>
+    <mc:Fallback xmlns="">
+      <p:transition spd="med">
+        <p:fade/>
+      </p:transition>
+    </mc:Fallback>
+  </mc:AlternateContent>
+</p:sld>
+</file>
+
+<file path=ppt/slides/slide13.xml><?xml version="1.0" encoding="utf-8"?>
+<p:sld xmlns:a="http://schemas.openxmlformats.org/drawingml/2006/main" xmlns:r="http://schemas.openxmlformats.org/officeDocument/2006/relationships" xmlns:p="http://schemas.openxmlformats.org/presentationml/2006/main">
+  <p:cSld>
+    <p:spTree>
+      <p:nvGrpSpPr>
+        <p:cNvPr id="1" name="">
+          <a:extLst>
+            <a:ext uri="{FF2B5EF4-FFF2-40B4-BE49-F238E27FC236}">
+              <a16:creationId xmlns:a16="http://schemas.microsoft.com/office/drawing/2014/main" id="{8B69413D-49D5-D8A1-4B1D-6A46D4C98C97}"/>
+            </a:ext>
+          </a:extLst>
+        </p:cNvPr>
+        <p:cNvGrpSpPr/>
+        <p:nvPr/>
+      </p:nvGrpSpPr>
+      <p:grpSpPr>
+        <a:xfrm>
+          <a:off x="0" y="0"/>
+          <a:ext cx="0" cy="0"/>
+          <a:chOff x="0" y="0"/>
+          <a:chExt cx="0" cy="0"/>
+        </a:xfrm>
+      </p:grpSpPr>
+      <p:sp>
+        <p:nvSpPr>
+          <p:cNvPr id="2" name="Slide Number Placeholder 1">
+            <a:extLst>
+              <a:ext uri="{FF2B5EF4-FFF2-40B4-BE49-F238E27FC236}">
+                <a16:creationId xmlns:a16="http://schemas.microsoft.com/office/drawing/2014/main" id="{B85561AC-1AB3-6977-115D-0B8F6D34800C}"/>
+              </a:ext>
+            </a:extLst>
+          </p:cNvPr>
+          <p:cNvSpPr>
+            <a:spLocks noGrp="1"/>
+          </p:cNvSpPr>
+          <p:nvPr>
+            <p:ph type="sldNum" sz="quarter" idx="12"/>
+          </p:nvPr>
+        </p:nvSpPr>
+        <p:spPr>
+          <a:xfrm>
+            <a:off x="11252200" y="6315075"/>
+            <a:ext cx="406400" cy="365125"/>
+          </a:xfrm>
+        </p:spPr>
+        <p:txBody>
+          <a:bodyPr anchor="ctr">
+            <a:normAutofit/>
+          </a:bodyPr>
+          <a:lstStyle/>
+          <a:p>
+            <a:pPr>
+              <a:spcAft>
+                <a:spcPts val="600"/>
+              </a:spcAft>
+            </a:pPr>
+            <a:fld id="{C263D6C4-4840-40CC-AC84-17E24B3B7BDE}" type="slidenum">
+              <a:rPr lang="en-US" smtClean="0"/>
+              <a:pPr>
+                <a:spcAft>
+                  <a:spcPts val="600"/>
+                </a:spcAft>
+              </a:pPr>
+              <a:t>13</a:t>
+            </a:fld>
+            <a:endParaRPr lang="en-US"/>
+          </a:p>
+        </p:txBody>
+      </p:sp>
+      <p:sp>
+        <p:nvSpPr>
+          <p:cNvPr id="5" name="Content Placeholder 4">
+            <a:extLst>
+              <a:ext uri="{FF2B5EF4-FFF2-40B4-BE49-F238E27FC236}">
+                <a16:creationId xmlns:a16="http://schemas.microsoft.com/office/drawing/2014/main" id="{16C97836-E1B8-3BCC-E8D3-0DD4CC2CBD8F}"/>
+              </a:ext>
+            </a:extLst>
+          </p:cNvPr>
+          <p:cNvSpPr>
+            <a:spLocks noGrp="1"/>
+          </p:cNvSpPr>
+          <p:nvPr>
+            <p:ph idx="1"/>
+          </p:nvPr>
+        </p:nvSpPr>
+        <p:spPr>
+          <a:xfrm>
+            <a:off x="443365" y="2684607"/>
+            <a:ext cx="11215235" cy="4351338"/>
+          </a:xfrm>
+        </p:spPr>
+        <p:txBody>
+          <a:bodyPr>
+            <a:normAutofit/>
+          </a:bodyPr>
+          <a:lstStyle/>
+          <a:p>
+            <a:pPr marL="0" indent="0" algn="ctr">
+              <a:buNone/>
+            </a:pPr>
+            <a:r>
+              <a:rPr lang="en-IN" sz="6600" dirty="0"/>
+              <a:t>Service Models</a:t>
+            </a:r>
+          </a:p>
+        </p:txBody>
+      </p:sp>
+    </p:spTree>
+    <p:extLst>
+      <p:ext uri="{BB962C8B-B14F-4D97-AF65-F5344CB8AC3E}">
+        <p14:creationId xmlns:p14="http://schemas.microsoft.com/office/powerpoint/2010/main" val="2721476448"/>
+      </p:ext>
+    </p:extLst>
+  </p:cSld>
+  <p:clrMapOvr>
+    <a:masterClrMapping/>
+  </p:clrMapOvr>
+  <mc:AlternateContent xmlns:mc="http://schemas.openxmlformats.org/markup-compatibility/2006">
+    <mc:Choice xmlns:p14="http://schemas.microsoft.com/office/powerpoint/2010/main" Requires="p14">
+      <p:transition spd="med" p14:dur="700">
+        <p:fade/>
+      </p:transition>
+    </mc:Choice>
+    <mc:Fallback>
+      <p:transition spd="med">
+        <p:fade/>
+      </p:transition>
+    </mc:Fallback>
+  </mc:AlternateContent>
+</p:sld>
+</file>
+
+<file path=ppt/slides/slide14.xml><?xml version="1.0" encoding="utf-8"?>
+<p:sld xmlns:a="http://schemas.openxmlformats.org/drawingml/2006/main" xmlns:r="http://schemas.openxmlformats.org/officeDocument/2006/relationships" xmlns:p="http://schemas.openxmlformats.org/presentationml/2006/main">
+  <p:cSld>
+    <p:spTree>
+      <p:nvGrpSpPr>
+        <p:cNvPr id="1" name="">
+          <a:extLst>
+            <a:ext uri="{FF2B5EF4-FFF2-40B4-BE49-F238E27FC236}">
+              <a16:creationId xmlns:a16="http://schemas.microsoft.com/office/drawing/2014/main" id="{BC551B4F-77DB-6A26-044E-DEA64F28CE32}"/>
+            </a:ext>
+          </a:extLst>
+        </p:cNvPr>
+        <p:cNvGrpSpPr/>
+        <p:nvPr/>
+      </p:nvGrpSpPr>
+      <p:grpSpPr>
+        <a:xfrm>
+          <a:off x="0" y="0"/>
+          <a:ext cx="0" cy="0"/>
+          <a:chOff x="0" y="0"/>
+          <a:chExt cx="0" cy="0"/>
+        </a:xfrm>
+      </p:grpSpPr>
+      <p:sp>
+        <p:nvSpPr>
+          <p:cNvPr id="2" name="Slide Number Placeholder 1">
+            <a:extLst>
+              <a:ext uri="{FF2B5EF4-FFF2-40B4-BE49-F238E27FC236}">
+                <a16:creationId xmlns:a16="http://schemas.microsoft.com/office/drawing/2014/main" id="{1A8B8B6E-B5D1-FE83-BBBF-7901635ED6D4}"/>
+              </a:ext>
+            </a:extLst>
+          </p:cNvPr>
+          <p:cNvSpPr>
+            <a:spLocks noGrp="1"/>
+          </p:cNvSpPr>
+          <p:nvPr>
+            <p:ph type="sldNum" sz="quarter" idx="12"/>
+          </p:nvPr>
+        </p:nvSpPr>
+        <p:spPr>
+          <a:xfrm>
+            <a:off x="11252200" y="6315075"/>
+            <a:ext cx="406400" cy="365125"/>
+          </a:xfrm>
+        </p:spPr>
+        <p:txBody>
+          <a:bodyPr anchor="ctr">
+            <a:normAutofit/>
+          </a:bodyPr>
+          <a:lstStyle/>
+          <a:p>
+            <a:pPr>
+              <a:spcAft>
+                <a:spcPts val="600"/>
+              </a:spcAft>
+            </a:pPr>
+            <a:fld id="{C263D6C4-4840-40CC-AC84-17E24B3B7BDE}" type="slidenum">
+              <a:rPr lang="en-US" smtClean="0"/>
+              <a:pPr>
+                <a:spcAft>
+                  <a:spcPts val="600"/>
+                </a:spcAft>
+              </a:pPr>
+              <a:t>14</a:t>
+            </a:fld>
+            <a:endParaRPr lang="en-US"/>
+          </a:p>
+        </p:txBody>
+      </p:sp>
+      <p:sp>
+        <p:nvSpPr>
+          <p:cNvPr id="5" name="Content Placeholder 4">
+            <a:extLst>
+              <a:ext uri="{FF2B5EF4-FFF2-40B4-BE49-F238E27FC236}">
+                <a16:creationId xmlns:a16="http://schemas.microsoft.com/office/drawing/2014/main" id="{B09DEE83-9FA9-CCB7-448B-99E41EE12652}"/>
+              </a:ext>
+            </a:extLst>
+          </p:cNvPr>
+          <p:cNvSpPr>
+            <a:spLocks noGrp="1"/>
+          </p:cNvSpPr>
+          <p:nvPr>
+            <p:ph idx="1"/>
+          </p:nvPr>
+        </p:nvSpPr>
+        <p:spPr>
+          <a:xfrm>
+            <a:off x="443365" y="2684607"/>
+            <a:ext cx="11215235" cy="4351338"/>
+          </a:xfrm>
+        </p:spPr>
+        <p:txBody>
+          <a:bodyPr>
+            <a:normAutofit/>
+          </a:bodyPr>
+          <a:lstStyle/>
+          <a:p>
+            <a:pPr marL="0" indent="0" algn="ctr">
+              <a:buNone/>
+            </a:pPr>
+            <a:r>
+              <a:rPr lang="en-IN" sz="6600" dirty="0"/>
+              <a:t>Databases</a:t>
+            </a:r>
+          </a:p>
+        </p:txBody>
+      </p:sp>
+    </p:spTree>
+    <p:extLst>
+      <p:ext uri="{BB962C8B-B14F-4D97-AF65-F5344CB8AC3E}">
+        <p14:creationId xmlns:p14="http://schemas.microsoft.com/office/powerpoint/2010/main" val="779412805"/>
+      </p:ext>
+    </p:extLst>
+  </p:cSld>
+  <p:clrMapOvr>
+    <a:masterClrMapping/>
+  </p:clrMapOvr>
+  <mc:AlternateContent xmlns:mc="http://schemas.openxmlformats.org/markup-compatibility/2006">
+    <mc:Choice xmlns:p14="http://schemas.microsoft.com/office/powerpoint/2010/main" Requires="p14">
+      <p:transition spd="med" p14:dur="700">
+        <p:fade/>
+      </p:transition>
+    </mc:Choice>
+    <mc:Fallback>
+      <p:transition spd="med">
+        <p:fade/>
+      </p:transition>
+    </mc:Fallback>
+  </mc:AlternateContent>
+</p:sld>
+</file>
+
+<file path=ppt/slides/slide15.xml><?xml version="1.0" encoding="utf-8"?>
+<p:sld xmlns:a="http://schemas.openxmlformats.org/drawingml/2006/main" xmlns:r="http://schemas.openxmlformats.org/officeDocument/2006/relationships" xmlns:p="http://schemas.openxmlformats.org/presentationml/2006/main">
+  <p:cSld>
+    <p:spTree>
+      <p:nvGrpSpPr>
+        <p:cNvPr id="1" name=""/>
+        <p:cNvGrpSpPr/>
+        <p:nvPr/>
+      </p:nvGrpSpPr>
+      <p:grpSpPr>
+        <a:xfrm>
+          <a:off x="0" y="0"/>
+          <a:ext cx="0" cy="0"/>
+          <a:chOff x="0" y="0"/>
+          <a:chExt cx="0" cy="0"/>
+        </a:xfrm>
+      </p:grpSpPr>
+      <p:sp>
+        <p:nvSpPr>
+          <p:cNvPr id="2" name="Title 1">
+            <a:extLst>
+              <a:ext uri="{FF2B5EF4-FFF2-40B4-BE49-F238E27FC236}">
+                <a16:creationId xmlns:a16="http://schemas.microsoft.com/office/drawing/2014/main" id="{6417DE06-3AEB-BB35-2B68-604339A0C8B9}"/>
+              </a:ext>
+            </a:extLst>
+          </p:cNvPr>
+          <p:cNvSpPr>
+            <a:spLocks noGrp="1"/>
+          </p:cNvSpPr>
+          <p:nvPr>
+            <p:ph type="title"/>
+          </p:nvPr>
+        </p:nvSpPr>
+        <p:spPr/>
+        <p:txBody>
+          <a:bodyPr/>
+          <a:lstStyle/>
+          <a:p>
+            <a:r>
+              <a:rPr lang="en-IN" dirty="0"/>
+              <a:t>Advanced Domain </a:t>
+            </a:r>
+            <a:r>
+              <a:rPr lang="en-IN" dirty="0" err="1"/>
+              <a:t>Modeling</a:t>
+            </a:r>
+            <a:endParaRPr lang="en-IN" dirty="0"/>
+          </a:p>
+        </p:txBody>
+      </p:sp>
+      <p:sp>
+        <p:nvSpPr>
+          <p:cNvPr id="3" name="Slide Number Placeholder 2">
+            <a:extLst>
+              <a:ext uri="{FF2B5EF4-FFF2-40B4-BE49-F238E27FC236}">
+                <a16:creationId xmlns:a16="http://schemas.microsoft.com/office/drawing/2014/main" id="{5B703EDB-158F-55B3-DABC-582A0A5B1873}"/>
+              </a:ext>
+            </a:extLst>
+          </p:cNvPr>
+          <p:cNvSpPr>
+            <a:spLocks noGrp="1"/>
+          </p:cNvSpPr>
+          <p:nvPr>
+            <p:ph type="sldNum" sz="quarter" idx="12"/>
+          </p:nvPr>
+        </p:nvSpPr>
+        <p:spPr/>
+        <p:txBody>
+          <a:bodyPr/>
+          <a:lstStyle/>
+          <a:p>
+            <a:fld id="{C263D6C4-4840-40CC-AC84-17E24B3B7BDE}" type="slidenum">
+              <a:rPr lang="en-US" noProof="0" smtClean="0"/>
+              <a:pPr/>
+              <a:t>15</a:t>
+            </a:fld>
+            <a:endParaRPr lang="en-US" noProof="0" dirty="0"/>
+          </a:p>
+        </p:txBody>
+      </p:sp>
+      <p:sp>
+        <p:nvSpPr>
+          <p:cNvPr id="4" name="TextBox 3">
+            <a:extLst>
+              <a:ext uri="{FF2B5EF4-FFF2-40B4-BE49-F238E27FC236}">
+                <a16:creationId xmlns:a16="http://schemas.microsoft.com/office/drawing/2014/main" id="{F418224E-A75D-3E93-6C3F-435683A6A2DD}"/>
+              </a:ext>
+            </a:extLst>
+          </p:cNvPr>
+          <p:cNvSpPr txBox="1"/>
+          <p:nvPr/>
+        </p:nvSpPr>
+        <p:spPr>
+          <a:xfrm>
+            <a:off x="651164" y="1801091"/>
+            <a:ext cx="10601036" cy="3600986"/>
+          </a:xfrm>
+          <a:prstGeom prst="rect">
+            <a:avLst/>
+          </a:prstGeom>
+          <a:noFill/>
+        </p:spPr>
+        <p:txBody>
+          <a:bodyPr wrap="square" rtlCol="0">
+            <a:spAutoFit/>
+          </a:bodyPr>
+          <a:lstStyle/>
+          <a:p>
+            <a:pPr marL="285750" indent="-285750">
+              <a:buFont typeface="Arial" panose="020B0604020202020204" pitchFamily="34" charset="0"/>
+              <a:buChar char="•"/>
+            </a:pPr>
+            <a:r>
+              <a:rPr lang="en-IN" sz="2400" dirty="0">
+                <a:solidFill>
+                  <a:schemeClr val="bg1"/>
+                </a:solidFill>
+              </a:rPr>
+              <a:t>Associations</a:t>
+            </a:r>
+          </a:p>
+          <a:p>
+            <a:pPr marL="1200150" lvl="2" indent="-285750">
+              <a:lnSpc>
+                <a:spcPct val="200000"/>
+              </a:lnSpc>
+              <a:buFont typeface="Wingdings" panose="05000000000000000000" pitchFamily="2" charset="2"/>
+              <a:buChar char="§"/>
+            </a:pPr>
+            <a:r>
+              <a:rPr lang="en-IN" dirty="0">
+                <a:solidFill>
+                  <a:schemeClr val="bg1"/>
+                </a:solidFill>
+              </a:rPr>
+              <a:t>To – One Association</a:t>
+            </a:r>
+          </a:p>
+          <a:p>
+            <a:pPr marL="1200150" lvl="2" indent="-285750">
+              <a:buFont typeface="Wingdings" panose="05000000000000000000" pitchFamily="2" charset="2"/>
+              <a:buChar char="§"/>
+            </a:pPr>
+            <a:r>
+              <a:rPr lang="en-IN" dirty="0">
+                <a:solidFill>
+                  <a:schemeClr val="bg1"/>
+                </a:solidFill>
+              </a:rPr>
+              <a:t>To – Many Association</a:t>
+            </a:r>
+          </a:p>
+          <a:p>
+            <a:pPr marL="285750" indent="-285750">
+              <a:buFont typeface="Arial" panose="020B0604020202020204" pitchFamily="34" charset="0"/>
+              <a:buChar char="•"/>
+            </a:pPr>
+            <a:r>
+              <a:rPr lang="en-IN" sz="2400" dirty="0">
+                <a:solidFill>
+                  <a:schemeClr val="bg1"/>
+                </a:solidFill>
+              </a:rPr>
+              <a:t>Compositions</a:t>
+            </a:r>
+          </a:p>
+          <a:p>
+            <a:pPr marL="1200150" lvl="2" indent="-285750">
+              <a:lnSpc>
+                <a:spcPct val="200000"/>
+              </a:lnSpc>
+              <a:buFont typeface="Wingdings" panose="05000000000000000000" pitchFamily="2" charset="2"/>
+              <a:buChar char="§"/>
+            </a:pPr>
+            <a:r>
+              <a:rPr lang="en-IN" dirty="0">
+                <a:solidFill>
+                  <a:schemeClr val="bg1"/>
+                </a:solidFill>
+              </a:rPr>
+              <a:t>To – One Association</a:t>
+            </a:r>
+          </a:p>
+          <a:p>
+            <a:pPr marL="1200150" lvl="2" indent="-285750">
+              <a:buFont typeface="Wingdings" panose="05000000000000000000" pitchFamily="2" charset="2"/>
+              <a:buChar char="§"/>
+            </a:pPr>
+            <a:r>
+              <a:rPr lang="en-IN" dirty="0">
+                <a:solidFill>
+                  <a:schemeClr val="bg1"/>
+                </a:solidFill>
+              </a:rPr>
+              <a:t>To – Many Association</a:t>
+            </a:r>
+            <a:endParaRPr lang="en-IN" sz="2400" dirty="0">
+              <a:solidFill>
+                <a:schemeClr val="bg1"/>
+              </a:solidFill>
+            </a:endParaRPr>
+          </a:p>
+          <a:p>
+            <a:pPr marL="285750" indent="-285750">
+              <a:buFont typeface="Arial" panose="020B0604020202020204" pitchFamily="34" charset="0"/>
+              <a:buChar char="•"/>
+            </a:pPr>
+            <a:r>
+              <a:rPr lang="en-IN" sz="2400" dirty="0">
+                <a:solidFill>
+                  <a:schemeClr val="bg1"/>
+                </a:solidFill>
+              </a:rPr>
+              <a:t>Aspects</a:t>
+            </a:r>
+          </a:p>
+          <a:p>
+            <a:pPr marL="285750" indent="-285750">
+              <a:buFont typeface="Arial" panose="020B0604020202020204" pitchFamily="34" charset="0"/>
+              <a:buChar char="•"/>
+            </a:pPr>
+            <a:r>
+              <a:rPr lang="en-IN" sz="2400" dirty="0">
+                <a:solidFill>
+                  <a:schemeClr val="bg1"/>
+                </a:solidFill>
+              </a:rPr>
+              <a:t>Extend</a:t>
+            </a:r>
+          </a:p>
+          <a:p>
+            <a:pPr marL="285750" indent="-285750">
+              <a:buFont typeface="Arial" panose="020B0604020202020204" pitchFamily="34" charset="0"/>
+              <a:buChar char="•"/>
+            </a:pPr>
+            <a:endParaRPr lang="en-IN" sz="2400" dirty="0">
+              <a:solidFill>
+                <a:schemeClr val="bg1"/>
+              </a:solidFill>
+            </a:endParaRPr>
+          </a:p>
+        </p:txBody>
+      </p:sp>
+    </p:spTree>
+    <p:extLst>
+      <p:ext uri="{BB962C8B-B14F-4D97-AF65-F5344CB8AC3E}">
+        <p14:creationId xmlns:p14="http://schemas.microsoft.com/office/powerpoint/2010/main" val="1628169627"/>
+      </p:ext>
+    </p:extLst>
+  </p:cSld>
+  <p:clrMapOvr>
+    <a:masterClrMapping/>
+  </p:clrMapOvr>
+</p:sld>
+</file>
+
 <file path=ppt/slides/slide2.xml><?xml version="1.0" encoding="utf-8"?>
 <p:sld xmlns:a="http://schemas.openxmlformats.org/drawingml/2006/main" xmlns:r="http://schemas.openxmlformats.org/officeDocument/2006/relationships" xmlns:p="http://schemas.openxmlformats.org/presentationml/2006/main">
   <p:cSld>
@@ -28577,13 +32324,13 @@
   <p:clrMapOvr>
     <a:masterClrMapping/>
   </p:clrMapOvr>
-  <mc:AlternateContent xmlns:mc="http://schemas.openxmlformats.org/markup-compatibility/2006">
-    <mc:Choice xmlns:p14="http://schemas.microsoft.com/office/powerpoint/2010/main" Requires="p14">
+  <mc:AlternateContent xmlns:mc="http://schemas.openxmlformats.org/markup-compatibility/2006" xmlns:p14="http://schemas.microsoft.com/office/powerpoint/2010/main">
+    <mc:Choice Requires="p14">
       <p:transition spd="med" p14:dur="700">
         <p:fade/>
       </p:transition>
     </mc:Choice>
-    <mc:Fallback>
+    <mc:Fallback xmlns="">
       <p:transition spd="med">
         <p:fade/>
       </p:transition>
@@ -28765,13 +32512,13 @@
   <p:clrMapOvr>
     <a:masterClrMapping/>
   </p:clrMapOvr>
-  <mc:AlternateContent xmlns:mc="http://schemas.openxmlformats.org/markup-compatibility/2006">
-    <mc:Choice xmlns:p14="http://schemas.microsoft.com/office/powerpoint/2010/main" Requires="p14">
+  <mc:AlternateContent xmlns:mc="http://schemas.openxmlformats.org/markup-compatibility/2006" xmlns:p14="http://schemas.microsoft.com/office/powerpoint/2010/main">
+    <mc:Choice Requires="p14">
       <p:transition spd="med" p14:dur="700">
         <p:fade/>
       </p:transition>
     </mc:Choice>
-    <mc:Fallback>
+    <mc:Fallback xmlns="">
       <p:transition spd="med">
         <p:fade/>
       </p:transition>
@@ -28965,13 +32712,13 @@
   <p:clrMapOvr>
     <a:masterClrMapping/>
   </p:clrMapOvr>
-  <mc:AlternateContent xmlns:mc="http://schemas.openxmlformats.org/markup-compatibility/2006">
-    <mc:Choice xmlns:p14="http://schemas.microsoft.com/office/powerpoint/2010/main" Requires="p14">
+  <mc:AlternateContent xmlns:mc="http://schemas.openxmlformats.org/markup-compatibility/2006" xmlns:p14="http://schemas.microsoft.com/office/powerpoint/2010/main">
+    <mc:Choice Requires="p14">
       <p:transition spd="med" p14:dur="700">
         <p:fade/>
       </p:transition>
     </mc:Choice>
-    <mc:Fallback>
+    <mc:Fallback xmlns="">
       <p:transition spd="med">
         <p:fade/>
       </p:transition>
@@ -29235,7 +32982,7 @@
               </a:lnSpc>
             </a:pPr>
             <a:r>
-              <a:rPr lang="en-IN" sz="1700"/>
+              <a:rPr lang="en-IN" sz="1700" dirty="0"/>
               <a:t>Browser based development environment</a:t>
             </a:r>
           </a:p>
@@ -29246,7 +32993,7 @@
               </a:lnSpc>
             </a:pPr>
             <a:r>
-              <a:rPr lang="en-IN" sz="1700"/>
+              <a:rPr lang="en-IN" sz="1700" dirty="0"/>
               <a:t>Private Virtual Machine in Cloud</a:t>
             </a:r>
           </a:p>
@@ -29257,7 +33004,7 @@
               </a:lnSpc>
             </a:pPr>
             <a:r>
-              <a:rPr lang="en-IN" sz="1700"/>
+              <a:rPr lang="en-IN" sz="1700" dirty="0"/>
               <a:t>VS Code Compatible Experience</a:t>
             </a:r>
           </a:p>
@@ -29268,7 +33015,7 @@
               </a:lnSpc>
             </a:pPr>
             <a:r>
-              <a:rPr lang="en-IN" sz="1700"/>
+              <a:rPr lang="en-IN" sz="1700" dirty="0"/>
               <a:t>Optimized for : </a:t>
             </a:r>
           </a:p>
@@ -29281,7 +33028,7 @@
               <a:buChar char="q"/>
             </a:pPr>
             <a:r>
-              <a:rPr lang="en-IN" sz="1700"/>
+              <a:rPr lang="en-IN" sz="1700" dirty="0"/>
               <a:t>SAP UI5</a:t>
             </a:r>
           </a:p>
@@ -29294,7 +33041,7 @@
               <a:buChar char="q"/>
             </a:pPr>
             <a:r>
-              <a:rPr lang="en-IN" sz="1700"/>
+              <a:rPr lang="en-IN" sz="1700" dirty="0"/>
               <a:t>Fiori</a:t>
             </a:r>
           </a:p>
@@ -29307,7 +33054,7 @@
               <a:buChar char="q"/>
             </a:pPr>
             <a:r>
-              <a:rPr lang="en-IN" sz="1700"/>
+              <a:rPr lang="en-IN" sz="1700" dirty="0"/>
               <a:t>CAP</a:t>
             </a:r>
           </a:p>
@@ -29320,7 +33067,7 @@
               <a:buChar char="q"/>
             </a:pPr>
             <a:r>
-              <a:rPr lang="en-IN" sz="1700"/>
+              <a:rPr lang="en-IN" sz="1700" dirty="0"/>
               <a:t>SAP BTP Development</a:t>
             </a:r>
           </a:p>
@@ -29372,13 +33119,13 @@
   <p:clrMapOvr>
     <a:masterClrMapping/>
   </p:clrMapOvr>
-  <mc:AlternateContent xmlns:mc="http://schemas.openxmlformats.org/markup-compatibility/2006">
-    <mc:Choice xmlns:p14="http://schemas.microsoft.com/office/powerpoint/2010/main" Requires="p14">
+  <mc:AlternateContent xmlns:mc="http://schemas.openxmlformats.org/markup-compatibility/2006" xmlns:p14="http://schemas.microsoft.com/office/powerpoint/2010/main">
+    <mc:Choice Requires="p14">
       <p:transition spd="med" p14:dur="700">
         <p:fade/>
       </p:transition>
     </mc:Choice>
-    <mc:Fallback>
+    <mc:Fallback xmlns="">
       <p:transition spd="med">
         <p:fade/>
       </p:transition>
@@ -29514,38 +33261,38 @@
           <a:lstStyle/>
           <a:p>
             <a:r>
-              <a:rPr lang="en-IN" sz="2900"/>
+              <a:rPr lang="en-IN" sz="2900" dirty="0"/>
               <a:t>SAP Fiori Dev Space</a:t>
             </a:r>
           </a:p>
           <a:p>
             <a:r>
-              <a:rPr lang="en-US" sz="2900"/>
+              <a:rPr lang="en-US" sz="2900" dirty="0"/>
               <a:t>Full Stack Cloud Application Dev Space</a:t>
             </a:r>
           </a:p>
           <a:p>
             <a:r>
-              <a:rPr lang="en-US" sz="2900"/>
+              <a:rPr lang="en-US" sz="2900" dirty="0"/>
               <a:t>Full Stack Application Using Productivity Tools</a:t>
             </a:r>
           </a:p>
           <a:p>
             <a:r>
-              <a:rPr lang="en-IN" sz="2900"/>
+              <a:rPr lang="en-IN" sz="2900" dirty="0"/>
               <a:t>SAP HANA Native Application</a:t>
             </a:r>
           </a:p>
           <a:p>
             <a:r>
-              <a:rPr lang="en-IN" sz="2900"/>
-              <a:t>Mobile Application Dev Space</a:t>
+              <a:rPr lang="en-IN" sz="2900" dirty="0"/>
+              <a:t>SAP Mobile Application Dev Space</a:t>
             </a:r>
           </a:p>
           <a:p>
             <a:r>
-              <a:rPr lang="en-IN" sz="2900"/>
-              <a:t>ABAP Dev Space</a:t>
+              <a:rPr lang="en-IN" sz="2900" dirty="0"/>
+              <a:t>Full Stack ABAP Application Dev Space</a:t>
             </a:r>
           </a:p>
         </p:txBody>
@@ -30355,23 +34102,6 @@
 </file>
 
 <file path=customXml/item1.xml><?xml version="1.0" encoding="utf-8"?>
-<p:properties xmlns:p="http://schemas.microsoft.com/office/2006/metadata/properties" xmlns:xsi="http://www.w3.org/2001/XMLSchema-instance" xmlns:pc="http://schemas.microsoft.com/office/infopath/2007/PartnerControls">
-  <documentManagement>
-    <MediaServiceKeyPoints xmlns="71af3243-3dd4-4a8d-8c0d-dd76da1f02a5" xsi:nil="true"/>
-  </documentManagement>
-</p:properties>
-</file>
-
-<file path=customXml/item2.xml><?xml version="1.0" encoding="utf-8"?>
-<?mso-contentType ?>
-<FormTemplates xmlns="http://schemas.microsoft.com/sharepoint/v3/contenttype/forms">
-  <Display>DocumentLibraryForm</Display>
-  <Edit>DocumentLibraryForm</Edit>
-  <New>DocumentLibraryForm</New>
-</FormTemplates>
-</file>
-
-<file path=customXml/item3.xml><?xml version="1.0" encoding="utf-8"?>
 <ct:contentTypeSchema xmlns:ct="http://schemas.microsoft.com/office/2006/metadata/contentType" xmlns:ma="http://schemas.microsoft.com/office/2006/metadata/properties/metaAttributes" ct:_="" ma:_="" ma:contentTypeName="Document" ma:contentTypeID="0x01010079F111ED35F8CC479449609E8A0923A6" ma:contentTypeVersion="11" ma:contentTypeDescription="Create a new document." ma:contentTypeScope="" ma:versionID="96291512c1ee715ab617f4c07df79fc1">
   <xsd:schema xmlns:xsd="http://www.w3.org/2001/XMLSchema" xmlns:xs="http://www.w3.org/2001/XMLSchema" xmlns:p="http://schemas.microsoft.com/office/2006/metadata/properties" xmlns:ns2="71af3243-3dd4-4a8d-8c0d-dd76da1f02a5" xmlns:ns3="16c05727-aa75-4e4a-9b5f-8a80a1165891" targetNamespace="http://schemas.microsoft.com/office/2006/metadata/properties" ma:root="true" ma:fieldsID="8256c27c40ca5c40ce1cf6c44f0205df" ns2:_="" ns3:_="">
     <xsd:import namespace="71af3243-3dd4-4a8d-8c0d-dd76da1f02a5"/>
@@ -30582,25 +34312,24 @@
 </ct:contentTypeSchema>
 </file>
 
-<file path=customXml/itemProps1.xml><?xml version="1.0" encoding="utf-8"?>
-<ds:datastoreItem xmlns:ds="http://schemas.openxmlformats.org/officeDocument/2006/customXml" ds:itemID="{F5757914-1161-4661-9696-421FD6935CDD}">
-  <ds:schemaRefs>
-    <ds:schemaRef ds:uri="http://schemas.microsoft.com/office/2006/metadata/properties"/>
-    <ds:schemaRef ds:uri="http://schemas.microsoft.com/office/infopath/2007/PartnerControls"/>
-    <ds:schemaRef ds:uri="71af3243-3dd4-4a8d-8c0d-dd76da1f02a5"/>
-  </ds:schemaRefs>
-</ds:datastoreItem>
+<file path=customXml/item2.xml><?xml version="1.0" encoding="utf-8"?>
+<?mso-contentType ?>
+<FormTemplates xmlns="http://schemas.microsoft.com/sharepoint/v3/contenttype/forms">
+  <Display>DocumentLibraryForm</Display>
+  <Edit>DocumentLibraryForm</Edit>
+  <New>DocumentLibraryForm</New>
+</FormTemplates>
 </file>
 
-<file path=customXml/itemProps2.xml><?xml version="1.0" encoding="utf-8"?>
-<ds:datastoreItem xmlns:ds="http://schemas.openxmlformats.org/officeDocument/2006/customXml" ds:itemID="{5B26E0C9-B2AA-42E6-97B6-E1B7D9EAF129}">
-  <ds:schemaRefs>
-    <ds:schemaRef ds:uri="http://schemas.microsoft.com/sharepoint/v3/contenttype/forms"/>
-  </ds:schemaRefs>
-</ds:datastoreItem>
+<file path=customXml/item3.xml><?xml version="1.0" encoding="utf-8"?>
+<p:properties xmlns:p="http://schemas.microsoft.com/office/2006/metadata/properties" xmlns:xsi="http://www.w3.org/2001/XMLSchema-instance" xmlns:pc="http://schemas.microsoft.com/office/infopath/2007/PartnerControls">
+  <documentManagement>
+    <MediaServiceKeyPoints xmlns="71af3243-3dd4-4a8d-8c0d-dd76da1f02a5" xsi:nil="true"/>
+  </documentManagement>
+</p:properties>
 </file>
 
-<file path=customXml/itemProps3.xml><?xml version="1.0" encoding="utf-8"?>
+<file path=customXml/itemProps1.xml><?xml version="1.0" encoding="utf-8"?>
 <ds:datastoreItem xmlns:ds="http://schemas.openxmlformats.org/officeDocument/2006/customXml" ds:itemID="{4C103400-4A22-4E35-B588-4C4D42638959}">
   <ds:schemaRefs>
     <ds:schemaRef ds:uri="http://schemas.microsoft.com/office/2006/metadata/contentType"/>
@@ -30617,4 +34346,22 @@
     <ds:schemaRef ds:uri="http://schemas.microsoft.com/internal/obd"/>
   </ds:schemaRefs>
 </ds:datastoreItem>
+</file>
+
+<file path=customXml/itemProps2.xml><?xml version="1.0" encoding="utf-8"?>
+<ds:datastoreItem xmlns:ds="http://schemas.openxmlformats.org/officeDocument/2006/customXml" ds:itemID="{5B26E0C9-B2AA-42E6-97B6-E1B7D9EAF129}">
+  <ds:schemaRefs>
+    <ds:schemaRef ds:uri="http://schemas.microsoft.com/sharepoint/v3/contenttype/forms"/>
+  </ds:schemaRefs>
+</ds:datastoreItem>
+</file>
+
+<file path=customXml/itemProps3.xml><?xml version="1.0" encoding="utf-8"?>
+<ds:datastoreItem xmlns:ds="http://schemas.openxmlformats.org/officeDocument/2006/customXml" ds:itemID="{F5757914-1161-4661-9696-421FD6935CDD}">
+  <ds:schemaRefs>
+    <ds:schemaRef ds:uri="http://schemas.microsoft.com/office/2006/metadata/properties"/>
+    <ds:schemaRef ds:uri="http://schemas.microsoft.com/office/infopath/2007/PartnerControls"/>
+    <ds:schemaRef ds:uri="71af3243-3dd4-4a8d-8c0d-dd76da1f02a5"/>
+  </ds:schemaRefs>
+</ds:datastoreItem>
 </file>